--- a/presentation.pptx
+++ b/presentation.pptx
@@ -110,6 +110,11 @@
       </a:defRPr>
     </a:lvl9pPr>
   </p:defaultTextStyle>
+  <p:extLst>
+    <p:ext uri="{EFAFB233-063F-42B5-8137-9DF3F51BA10A}">
+      <p15:sldGuideLst xmlns:p15="http://schemas.microsoft.com/office/powerpoint/2012/main"/>
+    </p:ext>
+  </p:extLst>
 </p:presentation>
 </file>
 
@@ -6169,6 +6174,208 @@
   <p:clrMapOvr>
     <a:masterClrMapping/>
   </p:clrMapOvr>
+  <p:timing>
+    <p:tnLst>
+      <p:par>
+        <p:cTn id="1" dur="indefinite" restart="never" nodeType="tmRoot">
+          <p:childTnLst>
+            <p:seq concurrent="1" nextAc="seek">
+              <p:cTn id="2" dur="indefinite" nodeType="mainSeq">
+                <p:childTnLst>
+                  <p:par>
+                    <p:cTn id="3" fill="hold">
+                      <p:stCondLst>
+                        <p:cond delay="indefinite"/>
+                      </p:stCondLst>
+                      <p:childTnLst>
+                        <p:par>
+                          <p:cTn id="4" fill="hold">
+                            <p:stCondLst>
+                              <p:cond delay="0"/>
+                            </p:stCondLst>
+                            <p:childTnLst>
+                              <p:par>
+                                <p:cTn id="5" presetID="10" presetClass="entr" presetSubtype="0" fill="hold" grpId="0" nodeType="clickEffect">
+                                  <p:stCondLst>
+                                    <p:cond delay="0"/>
+                                  </p:stCondLst>
+                                  <p:childTnLst>
+                                    <p:set>
+                                      <p:cBhvr>
+                                        <p:cTn id="6" dur="1" fill="hold">
+                                          <p:stCondLst>
+                                            <p:cond delay="0"/>
+                                          </p:stCondLst>
+                                        </p:cTn>
+                                        <p:tgtEl>
+                                          <p:spTgt spid="2"/>
+                                        </p:tgtEl>
+                                        <p:attrNameLst>
+                                          <p:attrName>style.visibility</p:attrName>
+                                        </p:attrNameLst>
+                                      </p:cBhvr>
+                                      <p:to>
+                                        <p:strVal val="visible"/>
+                                      </p:to>
+                                    </p:set>
+                                    <p:animEffect transition="in" filter="fade">
+                                      <p:cBhvr>
+                                        <p:cTn id="7" dur="500"/>
+                                        <p:tgtEl>
+                                          <p:spTgt spid="2"/>
+                                        </p:tgtEl>
+                                      </p:cBhvr>
+                                    </p:animEffect>
+                                  </p:childTnLst>
+                                </p:cTn>
+                              </p:par>
+                            </p:childTnLst>
+                          </p:cTn>
+                        </p:par>
+                      </p:childTnLst>
+                    </p:cTn>
+                  </p:par>
+                  <p:par>
+                    <p:cTn id="8" fill="hold">
+                      <p:stCondLst>
+                        <p:cond delay="indefinite"/>
+                      </p:stCondLst>
+                      <p:childTnLst>
+                        <p:par>
+                          <p:cTn id="9" fill="hold">
+                            <p:stCondLst>
+                              <p:cond delay="0"/>
+                            </p:stCondLst>
+                            <p:childTnLst>
+                              <p:par>
+                                <p:cTn id="10" presetID="42" presetClass="entr" presetSubtype="0" fill="hold" grpId="0" nodeType="clickEffect">
+                                  <p:stCondLst>
+                                    <p:cond delay="0"/>
+                                  </p:stCondLst>
+                                  <p:childTnLst>
+                                    <p:set>
+                                      <p:cBhvr>
+                                        <p:cTn id="11" dur="1" fill="hold">
+                                          <p:stCondLst>
+                                            <p:cond delay="0"/>
+                                          </p:stCondLst>
+                                        </p:cTn>
+                                        <p:tgtEl>
+                                          <p:spTgt spid="3">
+                                            <p:txEl>
+                                              <p:pRg st="0" end="0"/>
+                                            </p:txEl>
+                                          </p:spTgt>
+                                        </p:tgtEl>
+                                        <p:attrNameLst>
+                                          <p:attrName>style.visibility</p:attrName>
+                                        </p:attrNameLst>
+                                      </p:cBhvr>
+                                      <p:to>
+                                        <p:strVal val="visible"/>
+                                      </p:to>
+                                    </p:set>
+                                    <p:animEffect transition="in" filter="fade">
+                                      <p:cBhvr>
+                                        <p:cTn id="12" dur="1000"/>
+                                        <p:tgtEl>
+                                          <p:spTgt spid="3">
+                                            <p:txEl>
+                                              <p:pRg st="0" end="0"/>
+                                            </p:txEl>
+                                          </p:spTgt>
+                                        </p:tgtEl>
+                                      </p:cBhvr>
+                                    </p:animEffect>
+                                    <p:anim calcmode="lin" valueType="num">
+                                      <p:cBhvr>
+                                        <p:cTn id="13" dur="1000" fill="hold"/>
+                                        <p:tgtEl>
+                                          <p:spTgt spid="3">
+                                            <p:txEl>
+                                              <p:pRg st="0" end="0"/>
+                                            </p:txEl>
+                                          </p:spTgt>
+                                        </p:tgtEl>
+                                        <p:attrNameLst>
+                                          <p:attrName>ppt_x</p:attrName>
+                                        </p:attrNameLst>
+                                      </p:cBhvr>
+                                      <p:tavLst>
+                                        <p:tav tm="0">
+                                          <p:val>
+                                            <p:strVal val="#ppt_x"/>
+                                          </p:val>
+                                        </p:tav>
+                                        <p:tav tm="100000">
+                                          <p:val>
+                                            <p:strVal val="#ppt_x"/>
+                                          </p:val>
+                                        </p:tav>
+                                      </p:tavLst>
+                                    </p:anim>
+                                    <p:anim calcmode="lin" valueType="num">
+                                      <p:cBhvr>
+                                        <p:cTn id="14" dur="1000" fill="hold"/>
+                                        <p:tgtEl>
+                                          <p:spTgt spid="3">
+                                            <p:txEl>
+                                              <p:pRg st="0" end="0"/>
+                                            </p:txEl>
+                                          </p:spTgt>
+                                        </p:tgtEl>
+                                        <p:attrNameLst>
+                                          <p:attrName>ppt_y</p:attrName>
+                                        </p:attrNameLst>
+                                      </p:cBhvr>
+                                      <p:tavLst>
+                                        <p:tav tm="0">
+                                          <p:val>
+                                            <p:strVal val="#ppt_y+.1"/>
+                                          </p:val>
+                                        </p:tav>
+                                        <p:tav tm="100000">
+                                          <p:val>
+                                            <p:strVal val="#ppt_y"/>
+                                          </p:val>
+                                        </p:tav>
+                                      </p:tavLst>
+                                    </p:anim>
+                                  </p:childTnLst>
+                                </p:cTn>
+                              </p:par>
+                            </p:childTnLst>
+                          </p:cTn>
+                        </p:par>
+                      </p:childTnLst>
+                    </p:cTn>
+                  </p:par>
+                </p:childTnLst>
+              </p:cTn>
+              <p:prevCondLst>
+                <p:cond evt="onPrev" delay="0">
+                  <p:tgtEl>
+                    <p:sldTgt/>
+                  </p:tgtEl>
+                </p:cond>
+              </p:prevCondLst>
+              <p:nextCondLst>
+                <p:cond evt="onNext" delay="0">
+                  <p:tgtEl>
+                    <p:sldTgt/>
+                  </p:tgtEl>
+                </p:cond>
+              </p:nextCondLst>
+            </p:seq>
+          </p:childTnLst>
+        </p:cTn>
+      </p:par>
+    </p:tnLst>
+    <p:bldLst>
+      <p:bldP spid="2" grpId="0"/>
+      <p:bldP spid="3" grpId="0" build="p"/>
+    </p:bldLst>
+  </p:timing>
 </p:sld>
 </file>
 
@@ -6521,6 +6728,796 @@
   <p:clrMapOvr>
     <a:masterClrMapping/>
   </p:clrMapOvr>
+  <p:timing>
+    <p:tnLst>
+      <p:par>
+        <p:cTn id="1" dur="indefinite" restart="never" nodeType="tmRoot">
+          <p:childTnLst>
+            <p:seq concurrent="1" nextAc="seek">
+              <p:cTn id="2" dur="indefinite" nodeType="mainSeq">
+                <p:childTnLst>
+                  <p:par>
+                    <p:cTn id="3" fill="hold">
+                      <p:stCondLst>
+                        <p:cond delay="indefinite"/>
+                      </p:stCondLst>
+                      <p:childTnLst>
+                        <p:par>
+                          <p:cTn id="4" fill="hold">
+                            <p:stCondLst>
+                              <p:cond delay="0"/>
+                            </p:stCondLst>
+                            <p:childTnLst>
+                              <p:par>
+                                <p:cTn id="5" presetID="26" presetClass="entr" presetSubtype="0" fill="hold" grpId="0" nodeType="clickEffect">
+                                  <p:stCondLst>
+                                    <p:cond delay="0"/>
+                                  </p:stCondLst>
+                                  <p:childTnLst>
+                                    <p:set>
+                                      <p:cBhvr>
+                                        <p:cTn id="6" dur="1" fill="hold">
+                                          <p:stCondLst>
+                                            <p:cond delay="0"/>
+                                          </p:stCondLst>
+                                        </p:cTn>
+                                        <p:tgtEl>
+                                          <p:spTgt spid="2"/>
+                                        </p:tgtEl>
+                                        <p:attrNameLst>
+                                          <p:attrName>style.visibility</p:attrName>
+                                        </p:attrNameLst>
+                                      </p:cBhvr>
+                                      <p:to>
+                                        <p:strVal val="visible"/>
+                                      </p:to>
+                                    </p:set>
+                                    <p:animEffect transition="in" filter="wipe(down)">
+                                      <p:cBhvr>
+                                        <p:cTn id="7" dur="580">
+                                          <p:stCondLst>
+                                            <p:cond delay="0"/>
+                                          </p:stCondLst>
+                                        </p:cTn>
+                                        <p:tgtEl>
+                                          <p:spTgt spid="2"/>
+                                        </p:tgtEl>
+                                      </p:cBhvr>
+                                    </p:animEffect>
+                                    <p:anim calcmode="lin" valueType="num">
+                                      <p:cBhvr>
+                                        <p:cTn id="8" dur="1822" tmFilter="0,0; 0.14,0.36; 0.43,0.73; 0.71,0.91; 1.0,1.0">
+                                          <p:stCondLst>
+                                            <p:cond delay="0"/>
+                                          </p:stCondLst>
+                                        </p:cTn>
+                                        <p:tgtEl>
+                                          <p:spTgt spid="2"/>
+                                        </p:tgtEl>
+                                        <p:attrNameLst>
+                                          <p:attrName>ppt_x</p:attrName>
+                                        </p:attrNameLst>
+                                      </p:cBhvr>
+                                      <p:tavLst>
+                                        <p:tav tm="0">
+                                          <p:val>
+                                            <p:strVal val="#ppt_x-0.25"/>
+                                          </p:val>
+                                        </p:tav>
+                                        <p:tav tm="100000">
+                                          <p:val>
+                                            <p:strVal val="#ppt_x"/>
+                                          </p:val>
+                                        </p:tav>
+                                      </p:tavLst>
+                                    </p:anim>
+                                    <p:anim calcmode="lin" valueType="num">
+                                      <p:cBhvr>
+                                        <p:cTn id="9" dur="664" tmFilter="0.0,0.0; 0.25,0.07; 0.50,0.2; 0.75,0.467; 1.0,1.0">
+                                          <p:stCondLst>
+                                            <p:cond delay="0"/>
+                                          </p:stCondLst>
+                                        </p:cTn>
+                                        <p:tgtEl>
+                                          <p:spTgt spid="2"/>
+                                        </p:tgtEl>
+                                        <p:attrNameLst>
+                                          <p:attrName>ppt_y</p:attrName>
+                                        </p:attrNameLst>
+                                      </p:cBhvr>
+                                      <p:tavLst>
+                                        <p:tav tm="0" fmla="#ppt_y-sin(pi*$)/3">
+                                          <p:val>
+                                            <p:fltVal val="0.5"/>
+                                          </p:val>
+                                        </p:tav>
+                                        <p:tav tm="100000">
+                                          <p:val>
+                                            <p:fltVal val="1"/>
+                                          </p:val>
+                                        </p:tav>
+                                      </p:tavLst>
+                                    </p:anim>
+                                    <p:anim calcmode="lin" valueType="num">
+                                      <p:cBhvr>
+                                        <p:cTn id="10" dur="664" tmFilter="0, 0; 0.125,0.2665; 0.25,0.4; 0.375,0.465; 0.5,0.5;  0.625,0.535; 0.75,0.6; 0.875,0.7335; 1,1">
+                                          <p:stCondLst>
+                                            <p:cond delay="664"/>
+                                          </p:stCondLst>
+                                        </p:cTn>
+                                        <p:tgtEl>
+                                          <p:spTgt spid="2"/>
+                                        </p:tgtEl>
+                                        <p:attrNameLst>
+                                          <p:attrName>ppt_y</p:attrName>
+                                        </p:attrNameLst>
+                                      </p:cBhvr>
+                                      <p:tavLst>
+                                        <p:tav tm="0" fmla="#ppt_y-sin(pi*$)/9">
+                                          <p:val>
+                                            <p:fltVal val="0"/>
+                                          </p:val>
+                                        </p:tav>
+                                        <p:tav tm="100000">
+                                          <p:val>
+                                            <p:fltVal val="1"/>
+                                          </p:val>
+                                        </p:tav>
+                                      </p:tavLst>
+                                    </p:anim>
+                                    <p:anim calcmode="lin" valueType="num">
+                                      <p:cBhvr>
+                                        <p:cTn id="11" dur="332" tmFilter="0, 0; 0.125,0.2665; 0.25,0.4; 0.375,0.465; 0.5,0.5;  0.625,0.535; 0.75,0.6; 0.875,0.7335; 1,1">
+                                          <p:stCondLst>
+                                            <p:cond delay="1324"/>
+                                          </p:stCondLst>
+                                        </p:cTn>
+                                        <p:tgtEl>
+                                          <p:spTgt spid="2"/>
+                                        </p:tgtEl>
+                                        <p:attrNameLst>
+                                          <p:attrName>ppt_y</p:attrName>
+                                        </p:attrNameLst>
+                                      </p:cBhvr>
+                                      <p:tavLst>
+                                        <p:tav tm="0" fmla="#ppt_y-sin(pi*$)/27">
+                                          <p:val>
+                                            <p:fltVal val="0"/>
+                                          </p:val>
+                                        </p:tav>
+                                        <p:tav tm="100000">
+                                          <p:val>
+                                            <p:fltVal val="1"/>
+                                          </p:val>
+                                        </p:tav>
+                                      </p:tavLst>
+                                    </p:anim>
+                                    <p:anim calcmode="lin" valueType="num">
+                                      <p:cBhvr>
+                                        <p:cTn id="12" dur="164" tmFilter="0, 0; 0.125,0.2665; 0.25,0.4; 0.375,0.465; 0.5,0.5;  0.625,0.535; 0.75,0.6; 0.875,0.7335; 1,1">
+                                          <p:stCondLst>
+                                            <p:cond delay="1656"/>
+                                          </p:stCondLst>
+                                        </p:cTn>
+                                        <p:tgtEl>
+                                          <p:spTgt spid="2"/>
+                                        </p:tgtEl>
+                                        <p:attrNameLst>
+                                          <p:attrName>ppt_y</p:attrName>
+                                        </p:attrNameLst>
+                                      </p:cBhvr>
+                                      <p:tavLst>
+                                        <p:tav tm="0" fmla="#ppt_y-sin(pi*$)/81">
+                                          <p:val>
+                                            <p:fltVal val="0"/>
+                                          </p:val>
+                                        </p:tav>
+                                        <p:tav tm="100000">
+                                          <p:val>
+                                            <p:fltVal val="1"/>
+                                          </p:val>
+                                        </p:tav>
+                                      </p:tavLst>
+                                    </p:anim>
+                                    <p:animScale>
+                                      <p:cBhvr>
+                                        <p:cTn id="13" dur="26">
+                                          <p:stCondLst>
+                                            <p:cond delay="650"/>
+                                          </p:stCondLst>
+                                        </p:cTn>
+                                        <p:tgtEl>
+                                          <p:spTgt spid="2"/>
+                                        </p:tgtEl>
+                                      </p:cBhvr>
+                                      <p:to x="100000" y="60000"/>
+                                    </p:animScale>
+                                    <p:animScale>
+                                      <p:cBhvr>
+                                        <p:cTn id="14" dur="166" decel="50000">
+                                          <p:stCondLst>
+                                            <p:cond delay="676"/>
+                                          </p:stCondLst>
+                                        </p:cTn>
+                                        <p:tgtEl>
+                                          <p:spTgt spid="2"/>
+                                        </p:tgtEl>
+                                      </p:cBhvr>
+                                      <p:to x="100000" y="100000"/>
+                                    </p:animScale>
+                                    <p:animScale>
+                                      <p:cBhvr>
+                                        <p:cTn id="15" dur="26">
+                                          <p:stCondLst>
+                                            <p:cond delay="1312"/>
+                                          </p:stCondLst>
+                                        </p:cTn>
+                                        <p:tgtEl>
+                                          <p:spTgt spid="2"/>
+                                        </p:tgtEl>
+                                      </p:cBhvr>
+                                      <p:to x="100000" y="80000"/>
+                                    </p:animScale>
+                                    <p:animScale>
+                                      <p:cBhvr>
+                                        <p:cTn id="16" dur="166" decel="50000">
+                                          <p:stCondLst>
+                                            <p:cond delay="1338"/>
+                                          </p:stCondLst>
+                                        </p:cTn>
+                                        <p:tgtEl>
+                                          <p:spTgt spid="2"/>
+                                        </p:tgtEl>
+                                      </p:cBhvr>
+                                      <p:to x="100000" y="100000"/>
+                                    </p:animScale>
+                                    <p:animScale>
+                                      <p:cBhvr>
+                                        <p:cTn id="17" dur="26">
+                                          <p:stCondLst>
+                                            <p:cond delay="1642"/>
+                                          </p:stCondLst>
+                                        </p:cTn>
+                                        <p:tgtEl>
+                                          <p:spTgt spid="2"/>
+                                        </p:tgtEl>
+                                      </p:cBhvr>
+                                      <p:to x="100000" y="90000"/>
+                                    </p:animScale>
+                                    <p:animScale>
+                                      <p:cBhvr>
+                                        <p:cTn id="18" dur="166" decel="50000">
+                                          <p:stCondLst>
+                                            <p:cond delay="1668"/>
+                                          </p:stCondLst>
+                                        </p:cTn>
+                                        <p:tgtEl>
+                                          <p:spTgt spid="2"/>
+                                        </p:tgtEl>
+                                      </p:cBhvr>
+                                      <p:to x="100000" y="100000"/>
+                                    </p:animScale>
+                                    <p:animScale>
+                                      <p:cBhvr>
+                                        <p:cTn id="19" dur="26">
+                                          <p:stCondLst>
+                                            <p:cond delay="1808"/>
+                                          </p:stCondLst>
+                                        </p:cTn>
+                                        <p:tgtEl>
+                                          <p:spTgt spid="2"/>
+                                        </p:tgtEl>
+                                      </p:cBhvr>
+                                      <p:to x="100000" y="95000"/>
+                                    </p:animScale>
+                                    <p:animScale>
+                                      <p:cBhvr>
+                                        <p:cTn id="20" dur="166" decel="50000">
+                                          <p:stCondLst>
+                                            <p:cond delay="1834"/>
+                                          </p:stCondLst>
+                                        </p:cTn>
+                                        <p:tgtEl>
+                                          <p:spTgt spid="2"/>
+                                        </p:tgtEl>
+                                      </p:cBhvr>
+                                      <p:to x="100000" y="100000"/>
+                                    </p:animScale>
+                                  </p:childTnLst>
+                                </p:cTn>
+                              </p:par>
+                            </p:childTnLst>
+                          </p:cTn>
+                        </p:par>
+                      </p:childTnLst>
+                    </p:cTn>
+                  </p:par>
+                  <p:par>
+                    <p:cTn id="21" fill="hold">
+                      <p:stCondLst>
+                        <p:cond delay="indefinite"/>
+                      </p:stCondLst>
+                      <p:childTnLst>
+                        <p:par>
+                          <p:cTn id="22" fill="hold">
+                            <p:stCondLst>
+                              <p:cond delay="0"/>
+                            </p:stCondLst>
+                            <p:childTnLst>
+                              <p:par>
+                                <p:cTn id="23" presetID="42" presetClass="entr" presetSubtype="0" fill="hold" grpId="0" nodeType="clickEffect">
+                                  <p:stCondLst>
+                                    <p:cond delay="0"/>
+                                  </p:stCondLst>
+                                  <p:childTnLst>
+                                    <p:set>
+                                      <p:cBhvr>
+                                        <p:cTn id="24" dur="1" fill="hold">
+                                          <p:stCondLst>
+                                            <p:cond delay="0"/>
+                                          </p:stCondLst>
+                                        </p:cTn>
+                                        <p:tgtEl>
+                                          <p:spTgt spid="3">
+                                            <p:txEl>
+                                              <p:pRg st="0" end="0"/>
+                                            </p:txEl>
+                                          </p:spTgt>
+                                        </p:tgtEl>
+                                        <p:attrNameLst>
+                                          <p:attrName>style.visibility</p:attrName>
+                                        </p:attrNameLst>
+                                      </p:cBhvr>
+                                      <p:to>
+                                        <p:strVal val="visible"/>
+                                      </p:to>
+                                    </p:set>
+                                    <p:animEffect transition="in" filter="fade">
+                                      <p:cBhvr>
+                                        <p:cTn id="25" dur="1000"/>
+                                        <p:tgtEl>
+                                          <p:spTgt spid="3">
+                                            <p:txEl>
+                                              <p:pRg st="0" end="0"/>
+                                            </p:txEl>
+                                          </p:spTgt>
+                                        </p:tgtEl>
+                                      </p:cBhvr>
+                                    </p:animEffect>
+                                    <p:anim calcmode="lin" valueType="num">
+                                      <p:cBhvr>
+                                        <p:cTn id="26" dur="1000" fill="hold"/>
+                                        <p:tgtEl>
+                                          <p:spTgt spid="3">
+                                            <p:txEl>
+                                              <p:pRg st="0" end="0"/>
+                                            </p:txEl>
+                                          </p:spTgt>
+                                        </p:tgtEl>
+                                        <p:attrNameLst>
+                                          <p:attrName>ppt_x</p:attrName>
+                                        </p:attrNameLst>
+                                      </p:cBhvr>
+                                      <p:tavLst>
+                                        <p:tav tm="0">
+                                          <p:val>
+                                            <p:strVal val="#ppt_x"/>
+                                          </p:val>
+                                        </p:tav>
+                                        <p:tav tm="100000">
+                                          <p:val>
+                                            <p:strVal val="#ppt_x"/>
+                                          </p:val>
+                                        </p:tav>
+                                      </p:tavLst>
+                                    </p:anim>
+                                    <p:anim calcmode="lin" valueType="num">
+                                      <p:cBhvr>
+                                        <p:cTn id="27" dur="1000" fill="hold"/>
+                                        <p:tgtEl>
+                                          <p:spTgt spid="3">
+                                            <p:txEl>
+                                              <p:pRg st="0" end="0"/>
+                                            </p:txEl>
+                                          </p:spTgt>
+                                        </p:tgtEl>
+                                        <p:attrNameLst>
+                                          <p:attrName>ppt_y</p:attrName>
+                                        </p:attrNameLst>
+                                      </p:cBhvr>
+                                      <p:tavLst>
+                                        <p:tav tm="0">
+                                          <p:val>
+                                            <p:strVal val="#ppt_y+.1"/>
+                                          </p:val>
+                                        </p:tav>
+                                        <p:tav tm="100000">
+                                          <p:val>
+                                            <p:strVal val="#ppt_y"/>
+                                          </p:val>
+                                        </p:tav>
+                                      </p:tavLst>
+                                    </p:anim>
+                                  </p:childTnLst>
+                                </p:cTn>
+                              </p:par>
+                            </p:childTnLst>
+                          </p:cTn>
+                        </p:par>
+                      </p:childTnLst>
+                    </p:cTn>
+                  </p:par>
+                  <p:par>
+                    <p:cTn id="28" fill="hold">
+                      <p:stCondLst>
+                        <p:cond delay="indefinite"/>
+                      </p:stCondLst>
+                      <p:childTnLst>
+                        <p:par>
+                          <p:cTn id="29" fill="hold">
+                            <p:stCondLst>
+                              <p:cond delay="0"/>
+                            </p:stCondLst>
+                            <p:childTnLst>
+                              <p:par>
+                                <p:cTn id="30" presetID="42" presetClass="entr" presetSubtype="0" fill="hold" grpId="0" nodeType="clickEffect">
+                                  <p:stCondLst>
+                                    <p:cond delay="0"/>
+                                  </p:stCondLst>
+                                  <p:childTnLst>
+                                    <p:set>
+                                      <p:cBhvr>
+                                        <p:cTn id="31" dur="1" fill="hold">
+                                          <p:stCondLst>
+                                            <p:cond delay="0"/>
+                                          </p:stCondLst>
+                                        </p:cTn>
+                                        <p:tgtEl>
+                                          <p:spTgt spid="3">
+                                            <p:txEl>
+                                              <p:pRg st="1" end="1"/>
+                                            </p:txEl>
+                                          </p:spTgt>
+                                        </p:tgtEl>
+                                        <p:attrNameLst>
+                                          <p:attrName>style.visibility</p:attrName>
+                                        </p:attrNameLst>
+                                      </p:cBhvr>
+                                      <p:to>
+                                        <p:strVal val="visible"/>
+                                      </p:to>
+                                    </p:set>
+                                    <p:animEffect transition="in" filter="fade">
+                                      <p:cBhvr>
+                                        <p:cTn id="32" dur="1000"/>
+                                        <p:tgtEl>
+                                          <p:spTgt spid="3">
+                                            <p:txEl>
+                                              <p:pRg st="1" end="1"/>
+                                            </p:txEl>
+                                          </p:spTgt>
+                                        </p:tgtEl>
+                                      </p:cBhvr>
+                                    </p:animEffect>
+                                    <p:anim calcmode="lin" valueType="num">
+                                      <p:cBhvr>
+                                        <p:cTn id="33" dur="1000" fill="hold"/>
+                                        <p:tgtEl>
+                                          <p:spTgt spid="3">
+                                            <p:txEl>
+                                              <p:pRg st="1" end="1"/>
+                                            </p:txEl>
+                                          </p:spTgt>
+                                        </p:tgtEl>
+                                        <p:attrNameLst>
+                                          <p:attrName>ppt_x</p:attrName>
+                                        </p:attrNameLst>
+                                      </p:cBhvr>
+                                      <p:tavLst>
+                                        <p:tav tm="0">
+                                          <p:val>
+                                            <p:strVal val="#ppt_x"/>
+                                          </p:val>
+                                        </p:tav>
+                                        <p:tav tm="100000">
+                                          <p:val>
+                                            <p:strVal val="#ppt_x"/>
+                                          </p:val>
+                                        </p:tav>
+                                      </p:tavLst>
+                                    </p:anim>
+                                    <p:anim calcmode="lin" valueType="num">
+                                      <p:cBhvr>
+                                        <p:cTn id="34" dur="1000" fill="hold"/>
+                                        <p:tgtEl>
+                                          <p:spTgt spid="3">
+                                            <p:txEl>
+                                              <p:pRg st="1" end="1"/>
+                                            </p:txEl>
+                                          </p:spTgt>
+                                        </p:tgtEl>
+                                        <p:attrNameLst>
+                                          <p:attrName>ppt_y</p:attrName>
+                                        </p:attrNameLst>
+                                      </p:cBhvr>
+                                      <p:tavLst>
+                                        <p:tav tm="0">
+                                          <p:val>
+                                            <p:strVal val="#ppt_y+.1"/>
+                                          </p:val>
+                                        </p:tav>
+                                        <p:tav tm="100000">
+                                          <p:val>
+                                            <p:strVal val="#ppt_y"/>
+                                          </p:val>
+                                        </p:tav>
+                                      </p:tavLst>
+                                    </p:anim>
+                                  </p:childTnLst>
+                                </p:cTn>
+                              </p:par>
+                            </p:childTnLst>
+                          </p:cTn>
+                        </p:par>
+                      </p:childTnLst>
+                    </p:cTn>
+                  </p:par>
+                  <p:par>
+                    <p:cTn id="35" fill="hold">
+                      <p:stCondLst>
+                        <p:cond delay="indefinite"/>
+                      </p:stCondLst>
+                      <p:childTnLst>
+                        <p:par>
+                          <p:cTn id="36" fill="hold">
+                            <p:stCondLst>
+                              <p:cond delay="0"/>
+                            </p:stCondLst>
+                            <p:childTnLst>
+                              <p:par>
+                                <p:cTn id="37" presetID="42" presetClass="entr" presetSubtype="0" fill="hold" grpId="0" nodeType="clickEffect">
+                                  <p:stCondLst>
+                                    <p:cond delay="0"/>
+                                  </p:stCondLst>
+                                  <p:childTnLst>
+                                    <p:set>
+                                      <p:cBhvr>
+                                        <p:cTn id="38" dur="1" fill="hold">
+                                          <p:stCondLst>
+                                            <p:cond delay="0"/>
+                                          </p:stCondLst>
+                                        </p:cTn>
+                                        <p:tgtEl>
+                                          <p:spTgt spid="3">
+                                            <p:txEl>
+                                              <p:pRg st="2" end="2"/>
+                                            </p:txEl>
+                                          </p:spTgt>
+                                        </p:tgtEl>
+                                        <p:attrNameLst>
+                                          <p:attrName>style.visibility</p:attrName>
+                                        </p:attrNameLst>
+                                      </p:cBhvr>
+                                      <p:to>
+                                        <p:strVal val="visible"/>
+                                      </p:to>
+                                    </p:set>
+                                    <p:animEffect transition="in" filter="fade">
+                                      <p:cBhvr>
+                                        <p:cTn id="39" dur="1000"/>
+                                        <p:tgtEl>
+                                          <p:spTgt spid="3">
+                                            <p:txEl>
+                                              <p:pRg st="2" end="2"/>
+                                            </p:txEl>
+                                          </p:spTgt>
+                                        </p:tgtEl>
+                                      </p:cBhvr>
+                                    </p:animEffect>
+                                    <p:anim calcmode="lin" valueType="num">
+                                      <p:cBhvr>
+                                        <p:cTn id="40" dur="1000" fill="hold"/>
+                                        <p:tgtEl>
+                                          <p:spTgt spid="3">
+                                            <p:txEl>
+                                              <p:pRg st="2" end="2"/>
+                                            </p:txEl>
+                                          </p:spTgt>
+                                        </p:tgtEl>
+                                        <p:attrNameLst>
+                                          <p:attrName>ppt_x</p:attrName>
+                                        </p:attrNameLst>
+                                      </p:cBhvr>
+                                      <p:tavLst>
+                                        <p:tav tm="0">
+                                          <p:val>
+                                            <p:strVal val="#ppt_x"/>
+                                          </p:val>
+                                        </p:tav>
+                                        <p:tav tm="100000">
+                                          <p:val>
+                                            <p:strVal val="#ppt_x"/>
+                                          </p:val>
+                                        </p:tav>
+                                      </p:tavLst>
+                                    </p:anim>
+                                    <p:anim calcmode="lin" valueType="num">
+                                      <p:cBhvr>
+                                        <p:cTn id="41" dur="1000" fill="hold"/>
+                                        <p:tgtEl>
+                                          <p:spTgt spid="3">
+                                            <p:txEl>
+                                              <p:pRg st="2" end="2"/>
+                                            </p:txEl>
+                                          </p:spTgt>
+                                        </p:tgtEl>
+                                        <p:attrNameLst>
+                                          <p:attrName>ppt_y</p:attrName>
+                                        </p:attrNameLst>
+                                      </p:cBhvr>
+                                      <p:tavLst>
+                                        <p:tav tm="0">
+                                          <p:val>
+                                            <p:strVal val="#ppt_y+.1"/>
+                                          </p:val>
+                                        </p:tav>
+                                        <p:tav tm="100000">
+                                          <p:val>
+                                            <p:strVal val="#ppt_y"/>
+                                          </p:val>
+                                        </p:tav>
+                                      </p:tavLst>
+                                    </p:anim>
+                                  </p:childTnLst>
+                                </p:cTn>
+                              </p:par>
+                            </p:childTnLst>
+                          </p:cTn>
+                        </p:par>
+                      </p:childTnLst>
+                    </p:cTn>
+                  </p:par>
+                  <p:par>
+                    <p:cTn id="42" fill="hold">
+                      <p:stCondLst>
+                        <p:cond delay="indefinite"/>
+                      </p:stCondLst>
+                      <p:childTnLst>
+                        <p:par>
+                          <p:cTn id="43" fill="hold">
+                            <p:stCondLst>
+                              <p:cond delay="0"/>
+                            </p:stCondLst>
+                            <p:childTnLst>
+                              <p:par>
+                                <p:cTn id="44" presetID="42" presetClass="entr" presetSubtype="0" fill="hold" grpId="0" nodeType="clickEffect">
+                                  <p:stCondLst>
+                                    <p:cond delay="0"/>
+                                  </p:stCondLst>
+                                  <p:childTnLst>
+                                    <p:set>
+                                      <p:cBhvr>
+                                        <p:cTn id="45" dur="1" fill="hold">
+                                          <p:stCondLst>
+                                            <p:cond delay="0"/>
+                                          </p:stCondLst>
+                                        </p:cTn>
+                                        <p:tgtEl>
+                                          <p:spTgt spid="3">
+                                            <p:txEl>
+                                              <p:pRg st="3" end="3"/>
+                                            </p:txEl>
+                                          </p:spTgt>
+                                        </p:tgtEl>
+                                        <p:attrNameLst>
+                                          <p:attrName>style.visibility</p:attrName>
+                                        </p:attrNameLst>
+                                      </p:cBhvr>
+                                      <p:to>
+                                        <p:strVal val="visible"/>
+                                      </p:to>
+                                    </p:set>
+                                    <p:animEffect transition="in" filter="fade">
+                                      <p:cBhvr>
+                                        <p:cTn id="46" dur="1000"/>
+                                        <p:tgtEl>
+                                          <p:spTgt spid="3">
+                                            <p:txEl>
+                                              <p:pRg st="3" end="3"/>
+                                            </p:txEl>
+                                          </p:spTgt>
+                                        </p:tgtEl>
+                                      </p:cBhvr>
+                                    </p:animEffect>
+                                    <p:anim calcmode="lin" valueType="num">
+                                      <p:cBhvr>
+                                        <p:cTn id="47" dur="1000" fill="hold"/>
+                                        <p:tgtEl>
+                                          <p:spTgt spid="3">
+                                            <p:txEl>
+                                              <p:pRg st="3" end="3"/>
+                                            </p:txEl>
+                                          </p:spTgt>
+                                        </p:tgtEl>
+                                        <p:attrNameLst>
+                                          <p:attrName>ppt_x</p:attrName>
+                                        </p:attrNameLst>
+                                      </p:cBhvr>
+                                      <p:tavLst>
+                                        <p:tav tm="0">
+                                          <p:val>
+                                            <p:strVal val="#ppt_x"/>
+                                          </p:val>
+                                        </p:tav>
+                                        <p:tav tm="100000">
+                                          <p:val>
+                                            <p:strVal val="#ppt_x"/>
+                                          </p:val>
+                                        </p:tav>
+                                      </p:tavLst>
+                                    </p:anim>
+                                    <p:anim calcmode="lin" valueType="num">
+                                      <p:cBhvr>
+                                        <p:cTn id="48" dur="1000" fill="hold"/>
+                                        <p:tgtEl>
+                                          <p:spTgt spid="3">
+                                            <p:txEl>
+                                              <p:pRg st="3" end="3"/>
+                                            </p:txEl>
+                                          </p:spTgt>
+                                        </p:tgtEl>
+                                        <p:attrNameLst>
+                                          <p:attrName>ppt_y</p:attrName>
+                                        </p:attrNameLst>
+                                      </p:cBhvr>
+                                      <p:tavLst>
+                                        <p:tav tm="0">
+                                          <p:val>
+                                            <p:strVal val="#ppt_y+.1"/>
+                                          </p:val>
+                                        </p:tav>
+                                        <p:tav tm="100000">
+                                          <p:val>
+                                            <p:strVal val="#ppt_y"/>
+                                          </p:val>
+                                        </p:tav>
+                                      </p:tavLst>
+                                    </p:anim>
+                                  </p:childTnLst>
+                                </p:cTn>
+                              </p:par>
+                            </p:childTnLst>
+                          </p:cTn>
+                        </p:par>
+                      </p:childTnLst>
+                    </p:cTn>
+                  </p:par>
+                </p:childTnLst>
+              </p:cTn>
+              <p:prevCondLst>
+                <p:cond evt="onPrev" delay="0">
+                  <p:tgtEl>
+                    <p:sldTgt/>
+                  </p:tgtEl>
+                </p:cond>
+              </p:prevCondLst>
+              <p:nextCondLst>
+                <p:cond evt="onNext" delay="0">
+                  <p:tgtEl>
+                    <p:sldTgt/>
+                  </p:tgtEl>
+                </p:cond>
+              </p:nextCondLst>
+            </p:seq>
+          </p:childTnLst>
+        </p:cTn>
+      </p:par>
+    </p:tnLst>
+    <p:bldLst>
+      <p:bldP spid="2" grpId="0"/>
+      <p:bldP spid="3" grpId="0" build="p"/>
+    </p:bldLst>
+  </p:timing>
 </p:sld>
 </file>
 
@@ -6833,6 +7830,438 @@
   <p:clrMapOvr>
     <a:masterClrMapping/>
   </p:clrMapOvr>
+  <p:timing>
+    <p:tnLst>
+      <p:par>
+        <p:cTn id="1" dur="indefinite" restart="never" nodeType="tmRoot">
+          <p:childTnLst>
+            <p:seq concurrent="1" nextAc="seek">
+              <p:cTn id="2" dur="indefinite" nodeType="mainSeq">
+                <p:childTnLst>
+                  <p:par>
+                    <p:cTn id="3" fill="hold">
+                      <p:stCondLst>
+                        <p:cond delay="indefinite"/>
+                      </p:stCondLst>
+                      <p:childTnLst>
+                        <p:par>
+                          <p:cTn id="4" fill="hold">
+                            <p:stCondLst>
+                              <p:cond delay="0"/>
+                            </p:stCondLst>
+                            <p:childTnLst>
+                              <p:par>
+                                <p:cTn id="5" presetID="14" presetClass="entr" presetSubtype="10" fill="hold" grpId="0" nodeType="clickEffect">
+                                  <p:stCondLst>
+                                    <p:cond delay="0"/>
+                                  </p:stCondLst>
+                                  <p:childTnLst>
+                                    <p:set>
+                                      <p:cBhvr>
+                                        <p:cTn id="6" dur="1" fill="hold">
+                                          <p:stCondLst>
+                                            <p:cond delay="0"/>
+                                          </p:stCondLst>
+                                        </p:cTn>
+                                        <p:tgtEl>
+                                          <p:spTgt spid="2"/>
+                                        </p:tgtEl>
+                                        <p:attrNameLst>
+                                          <p:attrName>style.visibility</p:attrName>
+                                        </p:attrNameLst>
+                                      </p:cBhvr>
+                                      <p:to>
+                                        <p:strVal val="visible"/>
+                                      </p:to>
+                                    </p:set>
+                                    <p:animEffect transition="in" filter="randombar(horizontal)">
+                                      <p:cBhvr>
+                                        <p:cTn id="7" dur="500"/>
+                                        <p:tgtEl>
+                                          <p:spTgt spid="2"/>
+                                        </p:tgtEl>
+                                      </p:cBhvr>
+                                    </p:animEffect>
+                                  </p:childTnLst>
+                                </p:cTn>
+                              </p:par>
+                            </p:childTnLst>
+                          </p:cTn>
+                        </p:par>
+                      </p:childTnLst>
+                    </p:cTn>
+                  </p:par>
+                  <p:par>
+                    <p:cTn id="8" fill="hold">
+                      <p:stCondLst>
+                        <p:cond delay="indefinite"/>
+                      </p:stCondLst>
+                      <p:childTnLst>
+                        <p:par>
+                          <p:cTn id="9" fill="hold">
+                            <p:stCondLst>
+                              <p:cond delay="0"/>
+                            </p:stCondLst>
+                            <p:childTnLst>
+                              <p:par>
+                                <p:cTn id="10" presetID="42" presetClass="entr" presetSubtype="0" fill="hold" grpId="0" nodeType="clickEffect">
+                                  <p:stCondLst>
+                                    <p:cond delay="0"/>
+                                  </p:stCondLst>
+                                  <p:childTnLst>
+                                    <p:set>
+                                      <p:cBhvr>
+                                        <p:cTn id="11" dur="1" fill="hold">
+                                          <p:stCondLst>
+                                            <p:cond delay="0"/>
+                                          </p:stCondLst>
+                                        </p:cTn>
+                                        <p:tgtEl>
+                                          <p:spTgt spid="3">
+                                            <p:txEl>
+                                              <p:pRg st="0" end="0"/>
+                                            </p:txEl>
+                                          </p:spTgt>
+                                        </p:tgtEl>
+                                        <p:attrNameLst>
+                                          <p:attrName>style.visibility</p:attrName>
+                                        </p:attrNameLst>
+                                      </p:cBhvr>
+                                      <p:to>
+                                        <p:strVal val="visible"/>
+                                      </p:to>
+                                    </p:set>
+                                    <p:animEffect transition="in" filter="fade">
+                                      <p:cBhvr>
+                                        <p:cTn id="12" dur="1000"/>
+                                        <p:tgtEl>
+                                          <p:spTgt spid="3">
+                                            <p:txEl>
+                                              <p:pRg st="0" end="0"/>
+                                            </p:txEl>
+                                          </p:spTgt>
+                                        </p:tgtEl>
+                                      </p:cBhvr>
+                                    </p:animEffect>
+                                    <p:anim calcmode="lin" valueType="num">
+                                      <p:cBhvr>
+                                        <p:cTn id="13" dur="1000" fill="hold"/>
+                                        <p:tgtEl>
+                                          <p:spTgt spid="3">
+                                            <p:txEl>
+                                              <p:pRg st="0" end="0"/>
+                                            </p:txEl>
+                                          </p:spTgt>
+                                        </p:tgtEl>
+                                        <p:attrNameLst>
+                                          <p:attrName>ppt_x</p:attrName>
+                                        </p:attrNameLst>
+                                      </p:cBhvr>
+                                      <p:tavLst>
+                                        <p:tav tm="0">
+                                          <p:val>
+                                            <p:strVal val="#ppt_x"/>
+                                          </p:val>
+                                        </p:tav>
+                                        <p:tav tm="100000">
+                                          <p:val>
+                                            <p:strVal val="#ppt_x"/>
+                                          </p:val>
+                                        </p:tav>
+                                      </p:tavLst>
+                                    </p:anim>
+                                    <p:anim calcmode="lin" valueType="num">
+                                      <p:cBhvr>
+                                        <p:cTn id="14" dur="1000" fill="hold"/>
+                                        <p:tgtEl>
+                                          <p:spTgt spid="3">
+                                            <p:txEl>
+                                              <p:pRg st="0" end="0"/>
+                                            </p:txEl>
+                                          </p:spTgt>
+                                        </p:tgtEl>
+                                        <p:attrNameLst>
+                                          <p:attrName>ppt_y</p:attrName>
+                                        </p:attrNameLst>
+                                      </p:cBhvr>
+                                      <p:tavLst>
+                                        <p:tav tm="0">
+                                          <p:val>
+                                            <p:strVal val="#ppt_y+.1"/>
+                                          </p:val>
+                                        </p:tav>
+                                        <p:tav tm="100000">
+                                          <p:val>
+                                            <p:strVal val="#ppt_y"/>
+                                          </p:val>
+                                        </p:tav>
+                                      </p:tavLst>
+                                    </p:anim>
+                                  </p:childTnLst>
+                                </p:cTn>
+                              </p:par>
+                            </p:childTnLst>
+                          </p:cTn>
+                        </p:par>
+                      </p:childTnLst>
+                    </p:cTn>
+                  </p:par>
+                  <p:par>
+                    <p:cTn id="15" fill="hold">
+                      <p:stCondLst>
+                        <p:cond delay="indefinite"/>
+                      </p:stCondLst>
+                      <p:childTnLst>
+                        <p:par>
+                          <p:cTn id="16" fill="hold">
+                            <p:stCondLst>
+                              <p:cond delay="0"/>
+                            </p:stCondLst>
+                            <p:childTnLst>
+                              <p:par>
+                                <p:cTn id="17" presetID="42" presetClass="entr" presetSubtype="0" fill="hold" grpId="0" nodeType="clickEffect">
+                                  <p:stCondLst>
+                                    <p:cond delay="0"/>
+                                  </p:stCondLst>
+                                  <p:childTnLst>
+                                    <p:set>
+                                      <p:cBhvr>
+                                        <p:cTn id="18" dur="1" fill="hold">
+                                          <p:stCondLst>
+                                            <p:cond delay="0"/>
+                                          </p:stCondLst>
+                                        </p:cTn>
+                                        <p:tgtEl>
+                                          <p:spTgt spid="3">
+                                            <p:txEl>
+                                              <p:pRg st="1" end="1"/>
+                                            </p:txEl>
+                                          </p:spTgt>
+                                        </p:tgtEl>
+                                        <p:attrNameLst>
+                                          <p:attrName>style.visibility</p:attrName>
+                                        </p:attrNameLst>
+                                      </p:cBhvr>
+                                      <p:to>
+                                        <p:strVal val="visible"/>
+                                      </p:to>
+                                    </p:set>
+                                    <p:animEffect transition="in" filter="fade">
+                                      <p:cBhvr>
+                                        <p:cTn id="19" dur="1000"/>
+                                        <p:tgtEl>
+                                          <p:spTgt spid="3">
+                                            <p:txEl>
+                                              <p:pRg st="1" end="1"/>
+                                            </p:txEl>
+                                          </p:spTgt>
+                                        </p:tgtEl>
+                                      </p:cBhvr>
+                                    </p:animEffect>
+                                    <p:anim calcmode="lin" valueType="num">
+                                      <p:cBhvr>
+                                        <p:cTn id="20" dur="1000" fill="hold"/>
+                                        <p:tgtEl>
+                                          <p:spTgt spid="3">
+                                            <p:txEl>
+                                              <p:pRg st="1" end="1"/>
+                                            </p:txEl>
+                                          </p:spTgt>
+                                        </p:tgtEl>
+                                        <p:attrNameLst>
+                                          <p:attrName>ppt_x</p:attrName>
+                                        </p:attrNameLst>
+                                      </p:cBhvr>
+                                      <p:tavLst>
+                                        <p:tav tm="0">
+                                          <p:val>
+                                            <p:strVal val="#ppt_x"/>
+                                          </p:val>
+                                        </p:tav>
+                                        <p:tav tm="100000">
+                                          <p:val>
+                                            <p:strVal val="#ppt_x"/>
+                                          </p:val>
+                                        </p:tav>
+                                      </p:tavLst>
+                                    </p:anim>
+                                    <p:anim calcmode="lin" valueType="num">
+                                      <p:cBhvr>
+                                        <p:cTn id="21" dur="1000" fill="hold"/>
+                                        <p:tgtEl>
+                                          <p:spTgt spid="3">
+                                            <p:txEl>
+                                              <p:pRg st="1" end="1"/>
+                                            </p:txEl>
+                                          </p:spTgt>
+                                        </p:tgtEl>
+                                        <p:attrNameLst>
+                                          <p:attrName>ppt_y</p:attrName>
+                                        </p:attrNameLst>
+                                      </p:cBhvr>
+                                      <p:tavLst>
+                                        <p:tav tm="0">
+                                          <p:val>
+                                            <p:strVal val="#ppt_y+.1"/>
+                                          </p:val>
+                                        </p:tav>
+                                        <p:tav tm="100000">
+                                          <p:val>
+                                            <p:strVal val="#ppt_y"/>
+                                          </p:val>
+                                        </p:tav>
+                                      </p:tavLst>
+                                    </p:anim>
+                                  </p:childTnLst>
+                                </p:cTn>
+                              </p:par>
+                            </p:childTnLst>
+                          </p:cTn>
+                        </p:par>
+                      </p:childTnLst>
+                    </p:cTn>
+                  </p:par>
+                  <p:par>
+                    <p:cTn id="22" fill="hold">
+                      <p:stCondLst>
+                        <p:cond delay="indefinite"/>
+                      </p:stCondLst>
+                      <p:childTnLst>
+                        <p:par>
+                          <p:cTn id="23" fill="hold">
+                            <p:stCondLst>
+                              <p:cond delay="0"/>
+                            </p:stCondLst>
+                            <p:childTnLst>
+                              <p:par>
+                                <p:cTn id="24" presetID="42" presetClass="entr" presetSubtype="0" fill="hold" grpId="0" nodeType="clickEffect">
+                                  <p:stCondLst>
+                                    <p:cond delay="0"/>
+                                  </p:stCondLst>
+                                  <p:childTnLst>
+                                    <p:set>
+                                      <p:cBhvr>
+                                        <p:cTn id="25" dur="1" fill="hold">
+                                          <p:stCondLst>
+                                            <p:cond delay="0"/>
+                                          </p:stCondLst>
+                                        </p:cTn>
+                                        <p:tgtEl>
+                                          <p:spTgt spid="3">
+                                            <p:txEl>
+                                              <p:pRg st="2" end="2"/>
+                                            </p:txEl>
+                                          </p:spTgt>
+                                        </p:tgtEl>
+                                        <p:attrNameLst>
+                                          <p:attrName>style.visibility</p:attrName>
+                                        </p:attrNameLst>
+                                      </p:cBhvr>
+                                      <p:to>
+                                        <p:strVal val="visible"/>
+                                      </p:to>
+                                    </p:set>
+                                    <p:animEffect transition="in" filter="fade">
+                                      <p:cBhvr>
+                                        <p:cTn id="26" dur="1000"/>
+                                        <p:tgtEl>
+                                          <p:spTgt spid="3">
+                                            <p:txEl>
+                                              <p:pRg st="2" end="2"/>
+                                            </p:txEl>
+                                          </p:spTgt>
+                                        </p:tgtEl>
+                                      </p:cBhvr>
+                                    </p:animEffect>
+                                    <p:anim calcmode="lin" valueType="num">
+                                      <p:cBhvr>
+                                        <p:cTn id="27" dur="1000" fill="hold"/>
+                                        <p:tgtEl>
+                                          <p:spTgt spid="3">
+                                            <p:txEl>
+                                              <p:pRg st="2" end="2"/>
+                                            </p:txEl>
+                                          </p:spTgt>
+                                        </p:tgtEl>
+                                        <p:attrNameLst>
+                                          <p:attrName>ppt_x</p:attrName>
+                                        </p:attrNameLst>
+                                      </p:cBhvr>
+                                      <p:tavLst>
+                                        <p:tav tm="0">
+                                          <p:val>
+                                            <p:strVal val="#ppt_x"/>
+                                          </p:val>
+                                        </p:tav>
+                                        <p:tav tm="100000">
+                                          <p:val>
+                                            <p:strVal val="#ppt_x"/>
+                                          </p:val>
+                                        </p:tav>
+                                      </p:tavLst>
+                                    </p:anim>
+                                    <p:anim calcmode="lin" valueType="num">
+                                      <p:cBhvr>
+                                        <p:cTn id="28" dur="1000" fill="hold"/>
+                                        <p:tgtEl>
+                                          <p:spTgt spid="3">
+                                            <p:txEl>
+                                              <p:pRg st="2" end="2"/>
+                                            </p:txEl>
+                                          </p:spTgt>
+                                        </p:tgtEl>
+                                        <p:attrNameLst>
+                                          <p:attrName>ppt_y</p:attrName>
+                                        </p:attrNameLst>
+                                      </p:cBhvr>
+                                      <p:tavLst>
+                                        <p:tav tm="0">
+                                          <p:val>
+                                            <p:strVal val="#ppt_y+.1"/>
+                                          </p:val>
+                                        </p:tav>
+                                        <p:tav tm="100000">
+                                          <p:val>
+                                            <p:strVal val="#ppt_y"/>
+                                          </p:val>
+                                        </p:tav>
+                                      </p:tavLst>
+                                    </p:anim>
+                                  </p:childTnLst>
+                                </p:cTn>
+                              </p:par>
+                            </p:childTnLst>
+                          </p:cTn>
+                        </p:par>
+                      </p:childTnLst>
+                    </p:cTn>
+                  </p:par>
+                </p:childTnLst>
+              </p:cTn>
+              <p:prevCondLst>
+                <p:cond evt="onPrev" delay="0">
+                  <p:tgtEl>
+                    <p:sldTgt/>
+                  </p:tgtEl>
+                </p:cond>
+              </p:prevCondLst>
+              <p:nextCondLst>
+                <p:cond evt="onNext" delay="0">
+                  <p:tgtEl>
+                    <p:sldTgt/>
+                  </p:tgtEl>
+                </p:cond>
+              </p:nextCondLst>
+            </p:seq>
+          </p:childTnLst>
+        </p:cTn>
+      </p:par>
+    </p:tnLst>
+    <p:bldLst>
+      <p:bldP spid="2" grpId="0"/>
+      <p:bldP spid="3" grpId="0" uiExpand="1" build="p"/>
+    </p:bldLst>
+  </p:timing>
 </p:sld>
 </file>
 
@@ -7166,6 +8595,369 @@
   <p:clrMapOvr>
     <a:masterClrMapping/>
   </p:clrMapOvr>
+  <p:timing>
+    <p:tnLst>
+      <p:par>
+        <p:cTn id="1" dur="indefinite" restart="never" nodeType="tmRoot">
+          <p:childTnLst>
+            <p:seq concurrent="1" nextAc="seek">
+              <p:cTn id="2" dur="indefinite" nodeType="mainSeq">
+                <p:childTnLst>
+                  <p:par>
+                    <p:cTn id="3" fill="hold">
+                      <p:stCondLst>
+                        <p:cond delay="indefinite"/>
+                      </p:stCondLst>
+                      <p:childTnLst>
+                        <p:par>
+                          <p:cTn id="4" fill="hold">
+                            <p:stCondLst>
+                              <p:cond delay="0"/>
+                            </p:stCondLst>
+                            <p:childTnLst>
+                              <p:par>
+                                <p:cTn id="5" presetID="53" presetClass="entr" presetSubtype="16" fill="hold" grpId="0" nodeType="clickEffect">
+                                  <p:stCondLst>
+                                    <p:cond delay="0"/>
+                                  </p:stCondLst>
+                                  <p:childTnLst>
+                                    <p:set>
+                                      <p:cBhvr>
+                                        <p:cTn id="6" dur="1" fill="hold">
+                                          <p:stCondLst>
+                                            <p:cond delay="0"/>
+                                          </p:stCondLst>
+                                        </p:cTn>
+                                        <p:tgtEl>
+                                          <p:spTgt spid="2"/>
+                                        </p:tgtEl>
+                                        <p:attrNameLst>
+                                          <p:attrName>style.visibility</p:attrName>
+                                        </p:attrNameLst>
+                                      </p:cBhvr>
+                                      <p:to>
+                                        <p:strVal val="visible"/>
+                                      </p:to>
+                                    </p:set>
+                                    <p:anim calcmode="lin" valueType="num">
+                                      <p:cBhvr>
+                                        <p:cTn id="7" dur="500" fill="hold"/>
+                                        <p:tgtEl>
+                                          <p:spTgt spid="2"/>
+                                        </p:tgtEl>
+                                        <p:attrNameLst>
+                                          <p:attrName>ppt_w</p:attrName>
+                                        </p:attrNameLst>
+                                      </p:cBhvr>
+                                      <p:tavLst>
+                                        <p:tav tm="0">
+                                          <p:val>
+                                            <p:fltVal val="0"/>
+                                          </p:val>
+                                        </p:tav>
+                                        <p:tav tm="100000">
+                                          <p:val>
+                                            <p:strVal val="#ppt_w"/>
+                                          </p:val>
+                                        </p:tav>
+                                      </p:tavLst>
+                                    </p:anim>
+                                    <p:anim calcmode="lin" valueType="num">
+                                      <p:cBhvr>
+                                        <p:cTn id="8" dur="500" fill="hold"/>
+                                        <p:tgtEl>
+                                          <p:spTgt spid="2"/>
+                                        </p:tgtEl>
+                                        <p:attrNameLst>
+                                          <p:attrName>ppt_h</p:attrName>
+                                        </p:attrNameLst>
+                                      </p:cBhvr>
+                                      <p:tavLst>
+                                        <p:tav tm="0">
+                                          <p:val>
+                                            <p:fltVal val="0"/>
+                                          </p:val>
+                                        </p:tav>
+                                        <p:tav tm="100000">
+                                          <p:val>
+                                            <p:strVal val="#ppt_h"/>
+                                          </p:val>
+                                        </p:tav>
+                                      </p:tavLst>
+                                    </p:anim>
+                                    <p:animEffect transition="in" filter="fade">
+                                      <p:cBhvr>
+                                        <p:cTn id="9" dur="500"/>
+                                        <p:tgtEl>
+                                          <p:spTgt spid="2"/>
+                                        </p:tgtEl>
+                                      </p:cBhvr>
+                                    </p:animEffect>
+                                  </p:childTnLst>
+                                </p:cTn>
+                              </p:par>
+                            </p:childTnLst>
+                          </p:cTn>
+                        </p:par>
+                      </p:childTnLst>
+                    </p:cTn>
+                  </p:par>
+                  <p:par>
+                    <p:cTn id="10" fill="hold">
+                      <p:stCondLst>
+                        <p:cond delay="indefinite"/>
+                      </p:stCondLst>
+                      <p:childTnLst>
+                        <p:par>
+                          <p:cTn id="11" fill="hold">
+                            <p:stCondLst>
+                              <p:cond delay="0"/>
+                            </p:stCondLst>
+                            <p:childTnLst>
+                              <p:par>
+                                <p:cTn id="12" presetID="42" presetClass="entr" presetSubtype="0" fill="hold" grpId="0" nodeType="clickEffect">
+                                  <p:stCondLst>
+                                    <p:cond delay="0"/>
+                                  </p:stCondLst>
+                                  <p:childTnLst>
+                                    <p:set>
+                                      <p:cBhvr>
+                                        <p:cTn id="13" dur="1" fill="hold">
+                                          <p:stCondLst>
+                                            <p:cond delay="0"/>
+                                          </p:stCondLst>
+                                        </p:cTn>
+                                        <p:tgtEl>
+                                          <p:spTgt spid="3">
+                                            <p:txEl>
+                                              <p:pRg st="0" end="0"/>
+                                            </p:txEl>
+                                          </p:spTgt>
+                                        </p:tgtEl>
+                                        <p:attrNameLst>
+                                          <p:attrName>style.visibility</p:attrName>
+                                        </p:attrNameLst>
+                                      </p:cBhvr>
+                                      <p:to>
+                                        <p:strVal val="visible"/>
+                                      </p:to>
+                                    </p:set>
+                                    <p:animEffect transition="in" filter="fade">
+                                      <p:cBhvr>
+                                        <p:cTn id="14" dur="1000"/>
+                                        <p:tgtEl>
+                                          <p:spTgt spid="3">
+                                            <p:txEl>
+                                              <p:pRg st="0" end="0"/>
+                                            </p:txEl>
+                                          </p:spTgt>
+                                        </p:tgtEl>
+                                      </p:cBhvr>
+                                    </p:animEffect>
+                                    <p:anim calcmode="lin" valueType="num">
+                                      <p:cBhvr>
+                                        <p:cTn id="15" dur="1000" fill="hold"/>
+                                        <p:tgtEl>
+                                          <p:spTgt spid="3">
+                                            <p:txEl>
+                                              <p:pRg st="0" end="0"/>
+                                            </p:txEl>
+                                          </p:spTgt>
+                                        </p:tgtEl>
+                                        <p:attrNameLst>
+                                          <p:attrName>ppt_x</p:attrName>
+                                        </p:attrNameLst>
+                                      </p:cBhvr>
+                                      <p:tavLst>
+                                        <p:tav tm="0">
+                                          <p:val>
+                                            <p:strVal val="#ppt_x"/>
+                                          </p:val>
+                                        </p:tav>
+                                        <p:tav tm="100000">
+                                          <p:val>
+                                            <p:strVal val="#ppt_x"/>
+                                          </p:val>
+                                        </p:tav>
+                                      </p:tavLst>
+                                    </p:anim>
+                                    <p:anim calcmode="lin" valueType="num">
+                                      <p:cBhvr>
+                                        <p:cTn id="16" dur="1000" fill="hold"/>
+                                        <p:tgtEl>
+                                          <p:spTgt spid="3">
+                                            <p:txEl>
+                                              <p:pRg st="0" end="0"/>
+                                            </p:txEl>
+                                          </p:spTgt>
+                                        </p:tgtEl>
+                                        <p:attrNameLst>
+                                          <p:attrName>ppt_y</p:attrName>
+                                        </p:attrNameLst>
+                                      </p:cBhvr>
+                                      <p:tavLst>
+                                        <p:tav tm="0">
+                                          <p:val>
+                                            <p:strVal val="#ppt_y+.1"/>
+                                          </p:val>
+                                        </p:tav>
+                                        <p:tav tm="100000">
+                                          <p:val>
+                                            <p:strVal val="#ppt_y"/>
+                                          </p:val>
+                                        </p:tav>
+                                      </p:tavLst>
+                                    </p:anim>
+                                  </p:childTnLst>
+                                </p:cTn>
+                              </p:par>
+                            </p:childTnLst>
+                          </p:cTn>
+                        </p:par>
+                      </p:childTnLst>
+                    </p:cTn>
+                  </p:par>
+                  <p:par>
+                    <p:cTn id="17" fill="hold">
+                      <p:stCondLst>
+                        <p:cond delay="indefinite"/>
+                      </p:stCondLst>
+                      <p:childTnLst>
+                        <p:par>
+                          <p:cTn id="18" fill="hold">
+                            <p:stCondLst>
+                              <p:cond delay="0"/>
+                            </p:stCondLst>
+                            <p:childTnLst>
+                              <p:par>
+                                <p:cTn id="19" presetID="42" presetClass="entr" presetSubtype="0" fill="hold" grpId="0" nodeType="clickEffect">
+                                  <p:stCondLst>
+                                    <p:cond delay="0"/>
+                                  </p:stCondLst>
+                                  <p:childTnLst>
+                                    <p:set>
+                                      <p:cBhvr>
+                                        <p:cTn id="20" dur="1" fill="hold">
+                                          <p:stCondLst>
+                                            <p:cond delay="0"/>
+                                          </p:stCondLst>
+                                        </p:cTn>
+                                        <p:tgtEl>
+                                          <p:spTgt spid="3">
+                                            <p:txEl>
+                                              <p:pRg st="1" end="1"/>
+                                            </p:txEl>
+                                          </p:spTgt>
+                                        </p:tgtEl>
+                                        <p:attrNameLst>
+                                          <p:attrName>style.visibility</p:attrName>
+                                        </p:attrNameLst>
+                                      </p:cBhvr>
+                                      <p:to>
+                                        <p:strVal val="visible"/>
+                                      </p:to>
+                                    </p:set>
+                                    <p:animEffect transition="in" filter="fade">
+                                      <p:cBhvr>
+                                        <p:cTn id="21" dur="1000"/>
+                                        <p:tgtEl>
+                                          <p:spTgt spid="3">
+                                            <p:txEl>
+                                              <p:pRg st="1" end="1"/>
+                                            </p:txEl>
+                                          </p:spTgt>
+                                        </p:tgtEl>
+                                      </p:cBhvr>
+                                    </p:animEffect>
+                                    <p:anim calcmode="lin" valueType="num">
+                                      <p:cBhvr>
+                                        <p:cTn id="22" dur="1000" fill="hold"/>
+                                        <p:tgtEl>
+                                          <p:spTgt spid="3">
+                                            <p:txEl>
+                                              <p:pRg st="1" end="1"/>
+                                            </p:txEl>
+                                          </p:spTgt>
+                                        </p:tgtEl>
+                                        <p:attrNameLst>
+                                          <p:attrName>ppt_x</p:attrName>
+                                        </p:attrNameLst>
+                                      </p:cBhvr>
+                                      <p:tavLst>
+                                        <p:tav tm="0">
+                                          <p:val>
+                                            <p:strVal val="#ppt_x"/>
+                                          </p:val>
+                                        </p:tav>
+                                        <p:tav tm="100000">
+                                          <p:val>
+                                            <p:strVal val="#ppt_x"/>
+                                          </p:val>
+                                        </p:tav>
+                                      </p:tavLst>
+                                    </p:anim>
+                                    <p:anim calcmode="lin" valueType="num">
+                                      <p:cBhvr>
+                                        <p:cTn id="23" dur="1000" fill="hold"/>
+                                        <p:tgtEl>
+                                          <p:spTgt spid="3">
+                                            <p:txEl>
+                                              <p:pRg st="1" end="1"/>
+                                            </p:txEl>
+                                          </p:spTgt>
+                                        </p:tgtEl>
+                                        <p:attrNameLst>
+                                          <p:attrName>ppt_y</p:attrName>
+                                        </p:attrNameLst>
+                                      </p:cBhvr>
+                                      <p:tavLst>
+                                        <p:tav tm="0">
+                                          <p:val>
+                                            <p:strVal val="#ppt_y+.1"/>
+                                          </p:val>
+                                        </p:tav>
+                                        <p:tav tm="100000">
+                                          <p:val>
+                                            <p:strVal val="#ppt_y"/>
+                                          </p:val>
+                                        </p:tav>
+                                      </p:tavLst>
+                                    </p:anim>
+                                  </p:childTnLst>
+                                </p:cTn>
+                              </p:par>
+                            </p:childTnLst>
+                          </p:cTn>
+                        </p:par>
+                      </p:childTnLst>
+                    </p:cTn>
+                  </p:par>
+                </p:childTnLst>
+              </p:cTn>
+              <p:prevCondLst>
+                <p:cond evt="onPrev" delay="0">
+                  <p:tgtEl>
+                    <p:sldTgt/>
+                  </p:tgtEl>
+                </p:cond>
+              </p:prevCondLst>
+              <p:nextCondLst>
+                <p:cond evt="onNext" delay="0">
+                  <p:tgtEl>
+                    <p:sldTgt/>
+                  </p:tgtEl>
+                </p:cond>
+              </p:nextCondLst>
+            </p:seq>
+          </p:childTnLst>
+        </p:cTn>
+      </p:par>
+    </p:tnLst>
+    <p:bldLst>
+      <p:bldP spid="2" grpId="0"/>
+      <p:bldP spid="3" grpId="0" build="p"/>
+    </p:bldLst>
+  </p:timing>
 </p:sld>
 </file>
 
@@ -7329,6 +9121,507 @@
   <p:clrMapOvr>
     <a:masterClrMapping/>
   </p:clrMapOvr>
+  <p:timing>
+    <p:tnLst>
+      <p:par>
+        <p:cTn id="1" dur="indefinite" restart="never" nodeType="tmRoot">
+          <p:childTnLst>
+            <p:seq concurrent="1" nextAc="seek">
+              <p:cTn id="2" dur="indefinite" nodeType="mainSeq">
+                <p:childTnLst>
+                  <p:par>
+                    <p:cTn id="3" fill="hold">
+                      <p:stCondLst>
+                        <p:cond delay="indefinite"/>
+                      </p:stCondLst>
+                      <p:childTnLst>
+                        <p:par>
+                          <p:cTn id="4" fill="hold">
+                            <p:stCondLst>
+                              <p:cond delay="0"/>
+                            </p:stCondLst>
+                            <p:childTnLst>
+                              <p:par>
+                                <p:cTn id="5" presetID="31" presetClass="entr" presetSubtype="0" fill="hold" grpId="0" nodeType="clickEffect">
+                                  <p:stCondLst>
+                                    <p:cond delay="0"/>
+                                  </p:stCondLst>
+                                  <p:childTnLst>
+                                    <p:set>
+                                      <p:cBhvr>
+                                        <p:cTn id="6" dur="1" fill="hold">
+                                          <p:stCondLst>
+                                            <p:cond delay="0"/>
+                                          </p:stCondLst>
+                                        </p:cTn>
+                                        <p:tgtEl>
+                                          <p:spTgt spid="2"/>
+                                        </p:tgtEl>
+                                        <p:attrNameLst>
+                                          <p:attrName>style.visibility</p:attrName>
+                                        </p:attrNameLst>
+                                      </p:cBhvr>
+                                      <p:to>
+                                        <p:strVal val="visible"/>
+                                      </p:to>
+                                    </p:set>
+                                    <p:anim calcmode="lin" valueType="num">
+                                      <p:cBhvr>
+                                        <p:cTn id="7" dur="1000" fill="hold"/>
+                                        <p:tgtEl>
+                                          <p:spTgt spid="2"/>
+                                        </p:tgtEl>
+                                        <p:attrNameLst>
+                                          <p:attrName>ppt_w</p:attrName>
+                                        </p:attrNameLst>
+                                      </p:cBhvr>
+                                      <p:tavLst>
+                                        <p:tav tm="0">
+                                          <p:val>
+                                            <p:fltVal val="0"/>
+                                          </p:val>
+                                        </p:tav>
+                                        <p:tav tm="100000">
+                                          <p:val>
+                                            <p:strVal val="#ppt_w"/>
+                                          </p:val>
+                                        </p:tav>
+                                      </p:tavLst>
+                                    </p:anim>
+                                    <p:anim calcmode="lin" valueType="num">
+                                      <p:cBhvr>
+                                        <p:cTn id="8" dur="1000" fill="hold"/>
+                                        <p:tgtEl>
+                                          <p:spTgt spid="2"/>
+                                        </p:tgtEl>
+                                        <p:attrNameLst>
+                                          <p:attrName>ppt_h</p:attrName>
+                                        </p:attrNameLst>
+                                      </p:cBhvr>
+                                      <p:tavLst>
+                                        <p:tav tm="0">
+                                          <p:val>
+                                            <p:fltVal val="0"/>
+                                          </p:val>
+                                        </p:tav>
+                                        <p:tav tm="100000">
+                                          <p:val>
+                                            <p:strVal val="#ppt_h"/>
+                                          </p:val>
+                                        </p:tav>
+                                      </p:tavLst>
+                                    </p:anim>
+                                    <p:anim calcmode="lin" valueType="num">
+                                      <p:cBhvr>
+                                        <p:cTn id="9" dur="1000" fill="hold"/>
+                                        <p:tgtEl>
+                                          <p:spTgt spid="2"/>
+                                        </p:tgtEl>
+                                        <p:attrNameLst>
+                                          <p:attrName>style.rotation</p:attrName>
+                                        </p:attrNameLst>
+                                      </p:cBhvr>
+                                      <p:tavLst>
+                                        <p:tav tm="0">
+                                          <p:val>
+                                            <p:fltVal val="90"/>
+                                          </p:val>
+                                        </p:tav>
+                                        <p:tav tm="100000">
+                                          <p:val>
+                                            <p:fltVal val="0"/>
+                                          </p:val>
+                                        </p:tav>
+                                      </p:tavLst>
+                                    </p:anim>
+                                    <p:animEffect transition="in" filter="fade">
+                                      <p:cBhvr>
+                                        <p:cTn id="10" dur="1000"/>
+                                        <p:tgtEl>
+                                          <p:spTgt spid="2"/>
+                                        </p:tgtEl>
+                                      </p:cBhvr>
+                                    </p:animEffect>
+                                  </p:childTnLst>
+                                </p:cTn>
+                              </p:par>
+                            </p:childTnLst>
+                          </p:cTn>
+                        </p:par>
+                      </p:childTnLst>
+                    </p:cTn>
+                  </p:par>
+                  <p:par>
+                    <p:cTn id="11" fill="hold">
+                      <p:stCondLst>
+                        <p:cond delay="indefinite"/>
+                      </p:stCondLst>
+                      <p:childTnLst>
+                        <p:par>
+                          <p:cTn id="12" fill="hold">
+                            <p:stCondLst>
+                              <p:cond delay="0"/>
+                            </p:stCondLst>
+                            <p:childTnLst>
+                              <p:par>
+                                <p:cTn id="13" presetID="42" presetClass="entr" presetSubtype="0" fill="hold" grpId="0" nodeType="clickEffect">
+                                  <p:stCondLst>
+                                    <p:cond delay="0"/>
+                                  </p:stCondLst>
+                                  <p:childTnLst>
+                                    <p:set>
+                                      <p:cBhvr>
+                                        <p:cTn id="14" dur="1" fill="hold">
+                                          <p:stCondLst>
+                                            <p:cond delay="0"/>
+                                          </p:stCondLst>
+                                        </p:cTn>
+                                        <p:tgtEl>
+                                          <p:spTgt spid="3">
+                                            <p:txEl>
+                                              <p:pRg st="0" end="0"/>
+                                            </p:txEl>
+                                          </p:spTgt>
+                                        </p:tgtEl>
+                                        <p:attrNameLst>
+                                          <p:attrName>style.visibility</p:attrName>
+                                        </p:attrNameLst>
+                                      </p:cBhvr>
+                                      <p:to>
+                                        <p:strVal val="visible"/>
+                                      </p:to>
+                                    </p:set>
+                                    <p:animEffect transition="in" filter="fade">
+                                      <p:cBhvr>
+                                        <p:cTn id="15" dur="1000"/>
+                                        <p:tgtEl>
+                                          <p:spTgt spid="3">
+                                            <p:txEl>
+                                              <p:pRg st="0" end="0"/>
+                                            </p:txEl>
+                                          </p:spTgt>
+                                        </p:tgtEl>
+                                      </p:cBhvr>
+                                    </p:animEffect>
+                                    <p:anim calcmode="lin" valueType="num">
+                                      <p:cBhvr>
+                                        <p:cTn id="16" dur="1000" fill="hold"/>
+                                        <p:tgtEl>
+                                          <p:spTgt spid="3">
+                                            <p:txEl>
+                                              <p:pRg st="0" end="0"/>
+                                            </p:txEl>
+                                          </p:spTgt>
+                                        </p:tgtEl>
+                                        <p:attrNameLst>
+                                          <p:attrName>ppt_x</p:attrName>
+                                        </p:attrNameLst>
+                                      </p:cBhvr>
+                                      <p:tavLst>
+                                        <p:tav tm="0">
+                                          <p:val>
+                                            <p:strVal val="#ppt_x"/>
+                                          </p:val>
+                                        </p:tav>
+                                        <p:tav tm="100000">
+                                          <p:val>
+                                            <p:strVal val="#ppt_x"/>
+                                          </p:val>
+                                        </p:tav>
+                                      </p:tavLst>
+                                    </p:anim>
+                                    <p:anim calcmode="lin" valueType="num">
+                                      <p:cBhvr>
+                                        <p:cTn id="17" dur="1000" fill="hold"/>
+                                        <p:tgtEl>
+                                          <p:spTgt spid="3">
+                                            <p:txEl>
+                                              <p:pRg st="0" end="0"/>
+                                            </p:txEl>
+                                          </p:spTgt>
+                                        </p:tgtEl>
+                                        <p:attrNameLst>
+                                          <p:attrName>ppt_y</p:attrName>
+                                        </p:attrNameLst>
+                                      </p:cBhvr>
+                                      <p:tavLst>
+                                        <p:tav tm="0">
+                                          <p:val>
+                                            <p:strVal val="#ppt_y+.1"/>
+                                          </p:val>
+                                        </p:tav>
+                                        <p:tav tm="100000">
+                                          <p:val>
+                                            <p:strVal val="#ppt_y"/>
+                                          </p:val>
+                                        </p:tav>
+                                      </p:tavLst>
+                                    </p:anim>
+                                  </p:childTnLst>
+                                </p:cTn>
+                              </p:par>
+                            </p:childTnLst>
+                          </p:cTn>
+                        </p:par>
+                      </p:childTnLst>
+                    </p:cTn>
+                  </p:par>
+                  <p:par>
+                    <p:cTn id="18" fill="hold">
+                      <p:stCondLst>
+                        <p:cond delay="indefinite"/>
+                      </p:stCondLst>
+                      <p:childTnLst>
+                        <p:par>
+                          <p:cTn id="19" fill="hold">
+                            <p:stCondLst>
+                              <p:cond delay="0"/>
+                            </p:stCondLst>
+                            <p:childTnLst>
+                              <p:par>
+                                <p:cTn id="20" presetID="42" presetClass="entr" presetSubtype="0" fill="hold" grpId="0" nodeType="clickEffect">
+                                  <p:stCondLst>
+                                    <p:cond delay="0"/>
+                                  </p:stCondLst>
+                                  <p:childTnLst>
+                                    <p:set>
+                                      <p:cBhvr>
+                                        <p:cTn id="21" dur="1" fill="hold">
+                                          <p:stCondLst>
+                                            <p:cond delay="0"/>
+                                          </p:stCondLst>
+                                        </p:cTn>
+                                        <p:tgtEl>
+                                          <p:spTgt spid="3">
+                                            <p:txEl>
+                                              <p:pRg st="1" end="1"/>
+                                            </p:txEl>
+                                          </p:spTgt>
+                                        </p:tgtEl>
+                                        <p:attrNameLst>
+                                          <p:attrName>style.visibility</p:attrName>
+                                        </p:attrNameLst>
+                                      </p:cBhvr>
+                                      <p:to>
+                                        <p:strVal val="visible"/>
+                                      </p:to>
+                                    </p:set>
+                                    <p:animEffect transition="in" filter="fade">
+                                      <p:cBhvr>
+                                        <p:cTn id="22" dur="1000"/>
+                                        <p:tgtEl>
+                                          <p:spTgt spid="3">
+                                            <p:txEl>
+                                              <p:pRg st="1" end="1"/>
+                                            </p:txEl>
+                                          </p:spTgt>
+                                        </p:tgtEl>
+                                      </p:cBhvr>
+                                    </p:animEffect>
+                                    <p:anim calcmode="lin" valueType="num">
+                                      <p:cBhvr>
+                                        <p:cTn id="23" dur="1000" fill="hold"/>
+                                        <p:tgtEl>
+                                          <p:spTgt spid="3">
+                                            <p:txEl>
+                                              <p:pRg st="1" end="1"/>
+                                            </p:txEl>
+                                          </p:spTgt>
+                                        </p:tgtEl>
+                                        <p:attrNameLst>
+                                          <p:attrName>ppt_x</p:attrName>
+                                        </p:attrNameLst>
+                                      </p:cBhvr>
+                                      <p:tavLst>
+                                        <p:tav tm="0">
+                                          <p:val>
+                                            <p:strVal val="#ppt_x"/>
+                                          </p:val>
+                                        </p:tav>
+                                        <p:tav tm="100000">
+                                          <p:val>
+                                            <p:strVal val="#ppt_x"/>
+                                          </p:val>
+                                        </p:tav>
+                                      </p:tavLst>
+                                    </p:anim>
+                                    <p:anim calcmode="lin" valueType="num">
+                                      <p:cBhvr>
+                                        <p:cTn id="24" dur="1000" fill="hold"/>
+                                        <p:tgtEl>
+                                          <p:spTgt spid="3">
+                                            <p:txEl>
+                                              <p:pRg st="1" end="1"/>
+                                            </p:txEl>
+                                          </p:spTgt>
+                                        </p:tgtEl>
+                                        <p:attrNameLst>
+                                          <p:attrName>ppt_y</p:attrName>
+                                        </p:attrNameLst>
+                                      </p:cBhvr>
+                                      <p:tavLst>
+                                        <p:tav tm="0">
+                                          <p:val>
+                                            <p:strVal val="#ppt_y+.1"/>
+                                          </p:val>
+                                        </p:tav>
+                                        <p:tav tm="100000">
+                                          <p:val>
+                                            <p:strVal val="#ppt_y"/>
+                                          </p:val>
+                                        </p:tav>
+                                      </p:tavLst>
+                                    </p:anim>
+                                  </p:childTnLst>
+                                </p:cTn>
+                              </p:par>
+                            </p:childTnLst>
+                          </p:cTn>
+                        </p:par>
+                      </p:childTnLst>
+                    </p:cTn>
+                  </p:par>
+                  <p:par>
+                    <p:cTn id="25" fill="hold">
+                      <p:stCondLst>
+                        <p:cond delay="indefinite"/>
+                      </p:stCondLst>
+                      <p:childTnLst>
+                        <p:par>
+                          <p:cTn id="26" fill="hold">
+                            <p:stCondLst>
+                              <p:cond delay="0"/>
+                            </p:stCondLst>
+                            <p:childTnLst>
+                              <p:par>
+                                <p:cTn id="27" presetID="42" presetClass="entr" presetSubtype="0" fill="hold" grpId="0" nodeType="clickEffect">
+                                  <p:stCondLst>
+                                    <p:cond delay="0"/>
+                                  </p:stCondLst>
+                                  <p:childTnLst>
+                                    <p:set>
+                                      <p:cBhvr>
+                                        <p:cTn id="28" dur="1" fill="hold">
+                                          <p:stCondLst>
+                                            <p:cond delay="0"/>
+                                          </p:stCondLst>
+                                        </p:cTn>
+                                        <p:tgtEl>
+                                          <p:spTgt spid="3">
+                                            <p:txEl>
+                                              <p:pRg st="2" end="2"/>
+                                            </p:txEl>
+                                          </p:spTgt>
+                                        </p:tgtEl>
+                                        <p:attrNameLst>
+                                          <p:attrName>style.visibility</p:attrName>
+                                        </p:attrNameLst>
+                                      </p:cBhvr>
+                                      <p:to>
+                                        <p:strVal val="visible"/>
+                                      </p:to>
+                                    </p:set>
+                                    <p:animEffect transition="in" filter="fade">
+                                      <p:cBhvr>
+                                        <p:cTn id="29" dur="1000"/>
+                                        <p:tgtEl>
+                                          <p:spTgt spid="3">
+                                            <p:txEl>
+                                              <p:pRg st="2" end="2"/>
+                                            </p:txEl>
+                                          </p:spTgt>
+                                        </p:tgtEl>
+                                      </p:cBhvr>
+                                    </p:animEffect>
+                                    <p:anim calcmode="lin" valueType="num">
+                                      <p:cBhvr>
+                                        <p:cTn id="30" dur="1000" fill="hold"/>
+                                        <p:tgtEl>
+                                          <p:spTgt spid="3">
+                                            <p:txEl>
+                                              <p:pRg st="2" end="2"/>
+                                            </p:txEl>
+                                          </p:spTgt>
+                                        </p:tgtEl>
+                                        <p:attrNameLst>
+                                          <p:attrName>ppt_x</p:attrName>
+                                        </p:attrNameLst>
+                                      </p:cBhvr>
+                                      <p:tavLst>
+                                        <p:tav tm="0">
+                                          <p:val>
+                                            <p:strVal val="#ppt_x"/>
+                                          </p:val>
+                                        </p:tav>
+                                        <p:tav tm="100000">
+                                          <p:val>
+                                            <p:strVal val="#ppt_x"/>
+                                          </p:val>
+                                        </p:tav>
+                                      </p:tavLst>
+                                    </p:anim>
+                                    <p:anim calcmode="lin" valueType="num">
+                                      <p:cBhvr>
+                                        <p:cTn id="31" dur="1000" fill="hold"/>
+                                        <p:tgtEl>
+                                          <p:spTgt spid="3">
+                                            <p:txEl>
+                                              <p:pRg st="2" end="2"/>
+                                            </p:txEl>
+                                          </p:spTgt>
+                                        </p:tgtEl>
+                                        <p:attrNameLst>
+                                          <p:attrName>ppt_y</p:attrName>
+                                        </p:attrNameLst>
+                                      </p:cBhvr>
+                                      <p:tavLst>
+                                        <p:tav tm="0">
+                                          <p:val>
+                                            <p:strVal val="#ppt_y+.1"/>
+                                          </p:val>
+                                        </p:tav>
+                                        <p:tav tm="100000">
+                                          <p:val>
+                                            <p:strVal val="#ppt_y"/>
+                                          </p:val>
+                                        </p:tav>
+                                      </p:tavLst>
+                                    </p:anim>
+                                  </p:childTnLst>
+                                </p:cTn>
+                              </p:par>
+                            </p:childTnLst>
+                          </p:cTn>
+                        </p:par>
+                      </p:childTnLst>
+                    </p:cTn>
+                  </p:par>
+                </p:childTnLst>
+              </p:cTn>
+              <p:prevCondLst>
+                <p:cond evt="onPrev" delay="0">
+                  <p:tgtEl>
+                    <p:sldTgt/>
+                  </p:tgtEl>
+                </p:cond>
+              </p:prevCondLst>
+              <p:nextCondLst>
+                <p:cond evt="onNext" delay="0">
+                  <p:tgtEl>
+                    <p:sldTgt/>
+                  </p:tgtEl>
+                </p:cond>
+              </p:nextCondLst>
+            </p:seq>
+          </p:childTnLst>
+        </p:cTn>
+      </p:par>
+    </p:tnLst>
+    <p:bldLst>
+      <p:bldP spid="2" grpId="0"/>
+      <p:bldP spid="3" grpId="0" build="p"/>
+    </p:bldLst>
+  </p:timing>
 </p:sld>
 </file>
 
@@ -7641,7 +9934,7 @@
                             </p:stCondLst>
                             <p:childTnLst>
                               <p:par>
-                                <p:cTn id="5" presetID="2" presetClass="entr" presetSubtype="4" fill="hold" nodeType="clickEffect">
+                                <p:cTn id="5" presetID="31" presetClass="entr" presetSubtype="0" fill="hold" grpId="0" nodeType="clickEffect">
                                   <p:stCondLst>
                                     <p:cond delay="0"/>
                                   </p:stCondLst>
@@ -7649,6 +9942,181 @@
                                     <p:set>
                                       <p:cBhvr>
                                         <p:cTn id="6" dur="1" fill="hold">
+                                          <p:stCondLst>
+                                            <p:cond delay="0"/>
+                                          </p:stCondLst>
+                                        </p:cTn>
+                                        <p:tgtEl>
+                                          <p:spTgt spid="2"/>
+                                        </p:tgtEl>
+                                        <p:attrNameLst>
+                                          <p:attrName>style.visibility</p:attrName>
+                                        </p:attrNameLst>
+                                      </p:cBhvr>
+                                      <p:to>
+                                        <p:strVal val="visible"/>
+                                      </p:to>
+                                    </p:set>
+                                    <p:anim calcmode="lin" valueType="num">
+                                      <p:cBhvr>
+                                        <p:cTn id="7" dur="1000" fill="hold"/>
+                                        <p:tgtEl>
+                                          <p:spTgt spid="2"/>
+                                        </p:tgtEl>
+                                        <p:attrNameLst>
+                                          <p:attrName>ppt_w</p:attrName>
+                                        </p:attrNameLst>
+                                      </p:cBhvr>
+                                      <p:tavLst>
+                                        <p:tav tm="0">
+                                          <p:val>
+                                            <p:fltVal val="0"/>
+                                          </p:val>
+                                        </p:tav>
+                                        <p:tav tm="100000">
+                                          <p:val>
+                                            <p:strVal val="#ppt_w"/>
+                                          </p:val>
+                                        </p:tav>
+                                      </p:tavLst>
+                                    </p:anim>
+                                    <p:anim calcmode="lin" valueType="num">
+                                      <p:cBhvr>
+                                        <p:cTn id="8" dur="1000" fill="hold"/>
+                                        <p:tgtEl>
+                                          <p:spTgt spid="2"/>
+                                        </p:tgtEl>
+                                        <p:attrNameLst>
+                                          <p:attrName>ppt_h</p:attrName>
+                                        </p:attrNameLst>
+                                      </p:cBhvr>
+                                      <p:tavLst>
+                                        <p:tav tm="0">
+                                          <p:val>
+                                            <p:fltVal val="0"/>
+                                          </p:val>
+                                        </p:tav>
+                                        <p:tav tm="100000">
+                                          <p:val>
+                                            <p:strVal val="#ppt_h"/>
+                                          </p:val>
+                                        </p:tav>
+                                      </p:tavLst>
+                                    </p:anim>
+                                    <p:anim calcmode="lin" valueType="num">
+                                      <p:cBhvr>
+                                        <p:cTn id="9" dur="1000" fill="hold"/>
+                                        <p:tgtEl>
+                                          <p:spTgt spid="2"/>
+                                        </p:tgtEl>
+                                        <p:attrNameLst>
+                                          <p:attrName>style.rotation</p:attrName>
+                                        </p:attrNameLst>
+                                      </p:cBhvr>
+                                      <p:tavLst>
+                                        <p:tav tm="0">
+                                          <p:val>
+                                            <p:fltVal val="90"/>
+                                          </p:val>
+                                        </p:tav>
+                                        <p:tav tm="100000">
+                                          <p:val>
+                                            <p:fltVal val="0"/>
+                                          </p:val>
+                                        </p:tav>
+                                      </p:tavLst>
+                                    </p:anim>
+                                    <p:animEffect transition="in" filter="fade">
+                                      <p:cBhvr>
+                                        <p:cTn id="10" dur="1000"/>
+                                        <p:tgtEl>
+                                          <p:spTgt spid="2"/>
+                                        </p:tgtEl>
+                                      </p:cBhvr>
+                                    </p:animEffect>
+                                  </p:childTnLst>
+                                </p:cTn>
+                              </p:par>
+                            </p:childTnLst>
+                          </p:cTn>
+                        </p:par>
+                      </p:childTnLst>
+                    </p:cTn>
+                  </p:par>
+                  <p:par>
+                    <p:cTn id="11" fill="hold">
+                      <p:stCondLst>
+                        <p:cond delay="indefinite"/>
+                      </p:stCondLst>
+                      <p:childTnLst>
+                        <p:par>
+                          <p:cTn id="12" fill="hold">
+                            <p:stCondLst>
+                              <p:cond delay="0"/>
+                            </p:stCondLst>
+                            <p:childTnLst>
+                              <p:par>
+                                <p:cTn id="13" presetID="14" presetClass="entr" presetSubtype="10" fill="hold" grpId="0" nodeType="clickEffect">
+                                  <p:stCondLst>
+                                    <p:cond delay="0"/>
+                                  </p:stCondLst>
+                                  <p:childTnLst>
+                                    <p:set>
+                                      <p:cBhvr>
+                                        <p:cTn id="14" dur="1" fill="hold">
+                                          <p:stCondLst>
+                                            <p:cond delay="0"/>
+                                          </p:stCondLst>
+                                        </p:cTn>
+                                        <p:tgtEl>
+                                          <p:spTgt spid="12"/>
+                                        </p:tgtEl>
+                                        <p:attrNameLst>
+                                          <p:attrName>style.visibility</p:attrName>
+                                        </p:attrNameLst>
+                                      </p:cBhvr>
+                                      <p:to>
+                                        <p:strVal val="visible"/>
+                                      </p:to>
+                                    </p:set>
+                                    <p:animEffect transition="in" filter="randombar(horizontal)">
+                                      <p:cBhvr>
+                                        <p:cTn id="15" dur="500"/>
+                                        <p:tgtEl>
+                                          <p:spTgt spid="12"/>
+                                        </p:tgtEl>
+                                      </p:cBhvr>
+                                    </p:animEffect>
+                                  </p:childTnLst>
+                                </p:cTn>
+                              </p:par>
+                            </p:childTnLst>
+                          </p:cTn>
+                        </p:par>
+                      </p:childTnLst>
+                    </p:cTn>
+                  </p:par>
+                  <p:par>
+                    <p:cTn id="16" fill="hold">
+                      <p:stCondLst>
+                        <p:cond delay="indefinite"/>
+                      </p:stCondLst>
+                      <p:childTnLst>
+                        <p:par>
+                          <p:cTn id="17" fill="hold">
+                            <p:stCondLst>
+                              <p:cond delay="0"/>
+                            </p:stCondLst>
+                            <p:childTnLst>
+                              <p:par>
+                                <p:cTn id="18" presetID="2" presetClass="entr" presetSubtype="4" fill="hold" nodeType="clickEffect">
+                                  <p:stCondLst>
+                                    <p:cond delay="0"/>
+                                  </p:stCondLst>
+                                  <p:childTnLst>
+                                    <p:set>
+                                      <p:cBhvr>
+                                        <p:cTn id="19" dur="1" fill="hold">
                                           <p:stCondLst>
                                             <p:cond delay="0"/>
                                           </p:stCondLst>
@@ -7666,7 +10134,7 @@
                                     </p:set>
                                     <p:anim calcmode="lin" valueType="num">
                                       <p:cBhvr additive="base">
-                                        <p:cTn id="7" dur="500" fill="hold"/>
+                                        <p:cTn id="20" dur="500" fill="hold"/>
                                         <p:tgtEl>
                                           <p:spTgt spid="5"/>
                                         </p:tgtEl>
@@ -7689,7 +10157,7 @@
                                     </p:anim>
                                     <p:anim calcmode="lin" valueType="num">
                                       <p:cBhvr additive="base">
-                                        <p:cTn id="8" dur="500" fill="hold"/>
+                                        <p:cTn id="21" dur="500" fill="hold"/>
                                         <p:tgtEl>
                                           <p:spTgt spid="5"/>
                                         </p:tgtEl>
@@ -7720,32 +10188,32 @@
                     </p:cTn>
                   </p:par>
                   <p:par>
-                    <p:cTn id="9" fill="hold">
+                    <p:cTn id="22" fill="hold">
                       <p:stCondLst>
                         <p:cond delay="indefinite"/>
                       </p:stCondLst>
                       <p:childTnLst>
                         <p:par>
-                          <p:cTn id="10" fill="hold">
+                          <p:cTn id="23" fill="hold">
                             <p:stCondLst>
                               <p:cond delay="0"/>
                             </p:stCondLst>
                             <p:childTnLst>
                               <p:par>
-                                <p:cTn id="11" presetID="2" presetClass="entr" presetSubtype="4" fill="hold" nodeType="clickEffect">
+                                <p:cTn id="24" presetID="2" presetClass="entr" presetSubtype="4" fill="hold" grpId="0" nodeType="clickEffect">
                                   <p:stCondLst>
                                     <p:cond delay="0"/>
                                   </p:stCondLst>
                                   <p:childTnLst>
                                     <p:set>
                                       <p:cBhvr>
-                                        <p:cTn id="12" dur="1" fill="hold">
+                                        <p:cTn id="25" dur="1" fill="hold">
                                           <p:stCondLst>
                                             <p:cond delay="0"/>
                                           </p:stCondLst>
                                         </p:cTn>
                                         <p:tgtEl>
-                                          <p:spTgt spid="7"/>
+                                          <p:spTgt spid="16"/>
                                         </p:tgtEl>
                                         <p:attrNameLst>
                                           <p:attrName>style.visibility</p:attrName>
@@ -7757,9 +10225,9 @@
                                     </p:set>
                                     <p:anim calcmode="lin" valueType="num">
                                       <p:cBhvr additive="base">
-                                        <p:cTn id="13" dur="500" fill="hold"/>
+                                        <p:cTn id="26" dur="500" fill="hold"/>
                                         <p:tgtEl>
-                                          <p:spTgt spid="7"/>
+                                          <p:spTgt spid="16"/>
                                         </p:tgtEl>
                                         <p:attrNameLst>
                                           <p:attrName>ppt_x</p:attrName>
@@ -7780,9 +10248,9 @@
                                     </p:anim>
                                     <p:anim calcmode="lin" valueType="num">
                                       <p:cBhvr additive="base">
-                                        <p:cTn id="14" dur="500" fill="hold"/>
+                                        <p:cTn id="27" dur="500" fill="hold"/>
                                         <p:tgtEl>
-                                          <p:spTgt spid="7"/>
+                                          <p:spTgt spid="16"/>
                                         </p:tgtEl>
                                         <p:attrNameLst>
                                           <p:attrName>ppt_y</p:attrName>
@@ -7811,32 +10279,93 @@
                     </p:cTn>
                   </p:par>
                   <p:par>
-                    <p:cTn id="15" fill="hold">
+                    <p:cTn id="28" fill="hold">
                       <p:stCondLst>
                         <p:cond delay="indefinite"/>
                       </p:stCondLst>
                       <p:childTnLst>
                         <p:par>
-                          <p:cTn id="16" fill="hold">
+                          <p:cTn id="29" fill="hold">
                             <p:stCondLst>
                               <p:cond delay="0"/>
                             </p:stCondLst>
                             <p:childTnLst>
                               <p:par>
-                                <p:cTn id="17" presetID="2" presetClass="entr" presetSubtype="4" fill="hold" grpId="0" nodeType="clickEffect">
+                                <p:cTn id="30" presetID="14" presetClass="entr" presetSubtype="5" fill="hold" grpId="0" nodeType="clickEffect">
                                   <p:stCondLst>
                                     <p:cond delay="0"/>
                                   </p:stCondLst>
                                   <p:childTnLst>
                                     <p:set>
                                       <p:cBhvr>
-                                        <p:cTn id="18" dur="1" fill="hold">
+                                        <p:cTn id="31" dur="1" fill="hold">
                                           <p:stCondLst>
                                             <p:cond delay="0"/>
                                           </p:stCondLst>
                                         </p:cTn>
                                         <p:tgtEl>
-                                          <p:spTgt spid="16"/>
+                                          <p:spTgt spid="8">
+                                            <p:txEl>
+                                              <p:pRg st="0" end="0"/>
+                                            </p:txEl>
+                                          </p:spTgt>
+                                        </p:tgtEl>
+                                        <p:attrNameLst>
+                                          <p:attrName>style.visibility</p:attrName>
+                                        </p:attrNameLst>
+                                      </p:cBhvr>
+                                      <p:to>
+                                        <p:strVal val="visible"/>
+                                      </p:to>
+                                    </p:set>
+                                    <p:animEffect transition="in" filter="randombar(vertical)">
+                                      <p:cBhvr>
+                                        <p:cTn id="32" dur="500"/>
+                                        <p:tgtEl>
+                                          <p:spTgt spid="8">
+                                            <p:txEl>
+                                              <p:pRg st="0" end="0"/>
+                                            </p:txEl>
+                                          </p:spTgt>
+                                        </p:tgtEl>
+                                      </p:cBhvr>
+                                    </p:animEffect>
+                                  </p:childTnLst>
+                                </p:cTn>
+                              </p:par>
+                            </p:childTnLst>
+                          </p:cTn>
+                        </p:par>
+                      </p:childTnLst>
+                    </p:cTn>
+                  </p:par>
+                  <p:par>
+                    <p:cTn id="33" fill="hold">
+                      <p:stCondLst>
+                        <p:cond delay="indefinite"/>
+                      </p:stCondLst>
+                      <p:childTnLst>
+                        <p:par>
+                          <p:cTn id="34" fill="hold">
+                            <p:stCondLst>
+                              <p:cond delay="0"/>
+                            </p:stCondLst>
+                            <p:childTnLst>
+                              <p:par>
+                                <p:cTn id="35" presetID="2" presetClass="entr" presetSubtype="4" fill="hold" nodeType="clickEffect">
+                                  <p:stCondLst>
+                                    <p:cond delay="0"/>
+                                  </p:stCondLst>
+                                  <p:childTnLst>
+                                    <p:set>
+                                      <p:cBhvr>
+                                        <p:cTn id="36" dur="1" fill="hold">
+                                          <p:stCondLst>
+                                            <p:cond delay="0"/>
+                                          </p:stCondLst>
+                                        </p:cTn>
+                                        <p:tgtEl>
+                                          <p:spTgt spid="7"/>
                                         </p:tgtEl>
                                         <p:attrNameLst>
                                           <p:attrName>style.visibility</p:attrName>
@@ -7848,9 +10377,9 @@
                                     </p:set>
                                     <p:anim calcmode="lin" valueType="num">
                                       <p:cBhvr additive="base">
-                                        <p:cTn id="19" dur="500" fill="hold"/>
+                                        <p:cTn id="37" dur="500" fill="hold"/>
                                         <p:tgtEl>
-                                          <p:spTgt spid="16"/>
+                                          <p:spTgt spid="7"/>
                                         </p:tgtEl>
                                         <p:attrNameLst>
                                           <p:attrName>ppt_x</p:attrName>
@@ -7871,9 +10400,9 @@
                                     </p:anim>
                                     <p:anim calcmode="lin" valueType="num">
                                       <p:cBhvr additive="base">
-                                        <p:cTn id="20" dur="500" fill="hold"/>
+                                        <p:cTn id="38" dur="500" fill="hold"/>
                                         <p:tgtEl>
-                                          <p:spTgt spid="16"/>
+                                          <p:spTgt spid="7"/>
                                         </p:tgtEl>
                                         <p:attrNameLst>
                                           <p:attrName>ppt_y</p:attrName>
@@ -7923,6 +10452,9 @@
       </p:par>
     </p:tnLst>
     <p:bldLst>
+      <p:bldP spid="2" grpId="0"/>
+      <p:bldP spid="8" grpId="0" build="p"/>
+      <p:bldP spid="12" grpId="0"/>
       <p:bldP spid="16" grpId="0" animBg="1"/>
     </p:bldLst>
   </p:timing>
@@ -8071,6 +10603,200 @@
   <p:clrMapOvr>
     <a:masterClrMapping/>
   </p:clrMapOvr>
+  <p:timing>
+    <p:tnLst>
+      <p:par>
+        <p:cTn id="1" dur="indefinite" restart="never" nodeType="tmRoot">
+          <p:childTnLst>
+            <p:seq concurrent="1" nextAc="seek">
+              <p:cTn id="2" dur="indefinite" nodeType="mainSeq">
+                <p:childTnLst>
+                  <p:par>
+                    <p:cTn id="3" fill="hold">
+                      <p:stCondLst>
+                        <p:cond delay="indefinite"/>
+                      </p:stCondLst>
+                      <p:childTnLst>
+                        <p:par>
+                          <p:cTn id="4" fill="hold">
+                            <p:stCondLst>
+                              <p:cond delay="0"/>
+                            </p:stCondLst>
+                            <p:childTnLst>
+                              <p:par>
+                                <p:cTn id="5" presetID="45" presetClass="entr" presetSubtype="0" fill="hold" grpId="0" nodeType="clickEffect">
+                                  <p:stCondLst>
+                                    <p:cond delay="0"/>
+                                  </p:stCondLst>
+                                  <p:childTnLst>
+                                    <p:set>
+                                      <p:cBhvr>
+                                        <p:cTn id="6" dur="1" fill="hold">
+                                          <p:stCondLst>
+                                            <p:cond delay="0"/>
+                                          </p:stCondLst>
+                                        </p:cTn>
+                                        <p:tgtEl>
+                                          <p:spTgt spid="5"/>
+                                        </p:tgtEl>
+                                        <p:attrNameLst>
+                                          <p:attrName>style.visibility</p:attrName>
+                                        </p:attrNameLst>
+                                      </p:cBhvr>
+                                      <p:to>
+                                        <p:strVal val="visible"/>
+                                      </p:to>
+                                    </p:set>
+                                    <p:animEffect transition="in" filter="fade">
+                                      <p:cBhvr>
+                                        <p:cTn id="7" dur="2000"/>
+                                        <p:tgtEl>
+                                          <p:spTgt spid="5"/>
+                                        </p:tgtEl>
+                                      </p:cBhvr>
+                                    </p:animEffect>
+                                    <p:anim calcmode="lin" valueType="num">
+                                      <p:cBhvr>
+                                        <p:cTn id="8" dur="2000" fill="hold"/>
+                                        <p:tgtEl>
+                                          <p:spTgt spid="5"/>
+                                        </p:tgtEl>
+                                        <p:attrNameLst>
+                                          <p:attrName>ppt_w</p:attrName>
+                                        </p:attrNameLst>
+                                      </p:cBhvr>
+                                      <p:tavLst>
+                                        <p:tav tm="0" fmla="#ppt_w*sin(2.5*pi*$)">
+                                          <p:val>
+                                            <p:fltVal val="0"/>
+                                          </p:val>
+                                        </p:tav>
+                                        <p:tav tm="100000">
+                                          <p:val>
+                                            <p:fltVal val="1"/>
+                                          </p:val>
+                                        </p:tav>
+                                      </p:tavLst>
+                                    </p:anim>
+                                    <p:anim calcmode="lin" valueType="num">
+                                      <p:cBhvr>
+                                        <p:cTn id="9" dur="2000" fill="hold"/>
+                                        <p:tgtEl>
+                                          <p:spTgt spid="5"/>
+                                        </p:tgtEl>
+                                        <p:attrNameLst>
+                                          <p:attrName>ppt_h</p:attrName>
+                                        </p:attrNameLst>
+                                      </p:cBhvr>
+                                      <p:tavLst>
+                                        <p:tav tm="0">
+                                          <p:val>
+                                            <p:strVal val="#ppt_h"/>
+                                          </p:val>
+                                        </p:tav>
+                                        <p:tav tm="100000">
+                                          <p:val>
+                                            <p:strVal val="#ppt_h"/>
+                                          </p:val>
+                                        </p:tav>
+                                      </p:tavLst>
+                                    </p:anim>
+                                  </p:childTnLst>
+                                </p:cTn>
+                              </p:par>
+                            </p:childTnLst>
+                          </p:cTn>
+                        </p:par>
+                      </p:childTnLst>
+                    </p:cTn>
+                  </p:par>
+                  <p:par>
+                    <p:cTn id="10" fill="hold">
+                      <p:stCondLst>
+                        <p:cond delay="indefinite"/>
+                      </p:stCondLst>
+                      <p:childTnLst>
+                        <p:par>
+                          <p:cTn id="11" fill="hold">
+                            <p:stCondLst>
+                              <p:cond delay="0"/>
+                            </p:stCondLst>
+                            <p:childTnLst>
+                              <p:par>
+                                <p:cTn id="12" presetID="22" presetClass="entr" presetSubtype="4" fill="hold" grpId="0" nodeType="clickEffect">
+                                  <p:stCondLst>
+                                    <p:cond delay="0"/>
+                                  </p:stCondLst>
+                                  <p:childTnLst>
+                                    <p:set>
+                                      <p:cBhvr>
+                                        <p:cTn id="13" dur="1" fill="hold">
+                                          <p:stCondLst>
+                                            <p:cond delay="0"/>
+                                          </p:stCondLst>
+                                        </p:cTn>
+                                        <p:tgtEl>
+                                          <p:spTgt spid="6">
+                                            <p:txEl>
+                                              <p:pRg st="0" end="0"/>
+                                            </p:txEl>
+                                          </p:spTgt>
+                                        </p:tgtEl>
+                                        <p:attrNameLst>
+                                          <p:attrName>style.visibility</p:attrName>
+                                        </p:attrNameLst>
+                                      </p:cBhvr>
+                                      <p:to>
+                                        <p:strVal val="visible"/>
+                                      </p:to>
+                                    </p:set>
+                                    <p:animEffect transition="in" filter="wipe(down)">
+                                      <p:cBhvr>
+                                        <p:cTn id="14" dur="500"/>
+                                        <p:tgtEl>
+                                          <p:spTgt spid="6">
+                                            <p:txEl>
+                                              <p:pRg st="0" end="0"/>
+                                            </p:txEl>
+                                          </p:spTgt>
+                                        </p:tgtEl>
+                                      </p:cBhvr>
+                                    </p:animEffect>
+                                  </p:childTnLst>
+                                </p:cTn>
+                              </p:par>
+                            </p:childTnLst>
+                          </p:cTn>
+                        </p:par>
+                      </p:childTnLst>
+                    </p:cTn>
+                  </p:par>
+                </p:childTnLst>
+              </p:cTn>
+              <p:prevCondLst>
+                <p:cond evt="onPrev" delay="0">
+                  <p:tgtEl>
+                    <p:sldTgt/>
+                  </p:tgtEl>
+                </p:cond>
+              </p:prevCondLst>
+              <p:nextCondLst>
+                <p:cond evt="onNext" delay="0">
+                  <p:tgtEl>
+                    <p:sldTgt/>
+                  </p:tgtEl>
+                </p:cond>
+              </p:nextCondLst>
+            </p:seq>
+          </p:childTnLst>
+        </p:cTn>
+      </p:par>
+    </p:tnLst>
+    <p:bldLst>
+      <p:bldP spid="5" grpId="0"/>
+      <p:bldP spid="6" grpId="0" build="p"/>
+    </p:bldLst>
+  </p:timing>
 </p:sld>
 </file>
 

--- a/presentation.pptx
+++ b/presentation.pptx
@@ -10,8 +10,9 @@
     <p:sldId id="258" r:id="rId4"/>
     <p:sldId id="259" r:id="rId5"/>
     <p:sldId id="260" r:id="rId6"/>
-    <p:sldId id="261" r:id="rId7"/>
-    <p:sldId id="262" r:id="rId8"/>
+    <p:sldId id="263" r:id="rId7"/>
+    <p:sldId id="264" r:id="rId8"/>
+    <p:sldId id="262" r:id="rId9"/>
   </p:sldIdLst>
   <p:sldSz cx="12192000" cy="6858000"/>
   <p:notesSz cx="6858000" cy="9144000"/>
@@ -304,7 +305,7 @@
           <a:p>
             <a:fld id="{C969C9B9-ED5D-43CB-AC1B-AF4C7874EDD9}" type="datetimeFigureOut">
               <a:rPr lang="en-US" smtClean="0"/>
-              <a:t>5/4/2026</a:t>
+              <a:t>5/6/2026</a:t>
             </a:fld>
             <a:endParaRPr lang="en-US"/>
           </a:p>
@@ -579,7 +580,7 @@
           <a:p>
             <a:fld id="{C969C9B9-ED5D-43CB-AC1B-AF4C7874EDD9}" type="datetimeFigureOut">
               <a:rPr lang="en-US" smtClean="0"/>
-              <a:t>5/4/2026</a:t>
+              <a:t>5/6/2026</a:t>
             </a:fld>
             <a:endParaRPr lang="en-US"/>
           </a:p>
@@ -773,7 +774,7 @@
           <a:p>
             <a:fld id="{C969C9B9-ED5D-43CB-AC1B-AF4C7874EDD9}" type="datetimeFigureOut">
               <a:rPr lang="en-US" smtClean="0"/>
-              <a:t>5/4/2026</a:t>
+              <a:t>5/6/2026</a:t>
             </a:fld>
             <a:endParaRPr lang="en-US"/>
           </a:p>
@@ -1046,7 +1047,7 @@
           <a:p>
             <a:fld id="{C969C9B9-ED5D-43CB-AC1B-AF4C7874EDD9}" type="datetimeFigureOut">
               <a:rPr lang="en-US" smtClean="0"/>
-              <a:t>5/4/2026</a:t>
+              <a:t>5/6/2026</a:t>
             </a:fld>
             <a:endParaRPr lang="en-US"/>
           </a:p>
@@ -1387,7 +1388,7 @@
           <a:p>
             <a:fld id="{C969C9B9-ED5D-43CB-AC1B-AF4C7874EDD9}" type="datetimeFigureOut">
               <a:rPr lang="en-US" smtClean="0"/>
-              <a:t>5/4/2026</a:t>
+              <a:t>5/6/2026</a:t>
             </a:fld>
             <a:endParaRPr lang="en-US"/>
           </a:p>
@@ -2010,7 +2011,7 @@
           <a:p>
             <a:fld id="{C969C9B9-ED5D-43CB-AC1B-AF4C7874EDD9}" type="datetimeFigureOut">
               <a:rPr lang="en-US" smtClean="0"/>
-              <a:t>5/4/2026</a:t>
+              <a:t>5/6/2026</a:t>
             </a:fld>
             <a:endParaRPr lang="en-US"/>
           </a:p>
@@ -2870,7 +2871,7 @@
           <a:p>
             <a:fld id="{C969C9B9-ED5D-43CB-AC1B-AF4C7874EDD9}" type="datetimeFigureOut">
               <a:rPr lang="en-US" smtClean="0"/>
-              <a:t>5/4/2026</a:t>
+              <a:t>5/6/2026</a:t>
             </a:fld>
             <a:endParaRPr lang="en-US"/>
           </a:p>
@@ -3040,7 +3041,7 @@
           <a:p>
             <a:fld id="{C969C9B9-ED5D-43CB-AC1B-AF4C7874EDD9}" type="datetimeFigureOut">
               <a:rPr lang="en-US" smtClean="0"/>
-              <a:t>5/4/2026</a:t>
+              <a:t>5/6/2026</a:t>
             </a:fld>
             <a:endParaRPr lang="en-US"/>
           </a:p>
@@ -3220,7 +3221,7 @@
           <a:p>
             <a:fld id="{C969C9B9-ED5D-43CB-AC1B-AF4C7874EDD9}" type="datetimeFigureOut">
               <a:rPr lang="en-US" smtClean="0"/>
-              <a:t>5/4/2026</a:t>
+              <a:t>5/6/2026</a:t>
             </a:fld>
             <a:endParaRPr lang="en-US"/>
           </a:p>
@@ -3390,7 +3391,7 @@
           <a:p>
             <a:fld id="{C969C9B9-ED5D-43CB-AC1B-AF4C7874EDD9}" type="datetimeFigureOut">
               <a:rPr lang="en-US" smtClean="0"/>
-              <a:t>5/4/2026</a:t>
+              <a:t>5/6/2026</a:t>
             </a:fld>
             <a:endParaRPr lang="en-US"/>
           </a:p>
@@ -3637,7 +3638,7 @@
           <a:p>
             <a:fld id="{C969C9B9-ED5D-43CB-AC1B-AF4C7874EDD9}" type="datetimeFigureOut">
               <a:rPr lang="en-US" smtClean="0"/>
-              <a:t>5/4/2026</a:t>
+              <a:t>5/6/2026</a:t>
             </a:fld>
             <a:endParaRPr lang="en-US"/>
           </a:p>
@@ -3929,7 +3930,7 @@
           <a:p>
             <a:fld id="{C969C9B9-ED5D-43CB-AC1B-AF4C7874EDD9}" type="datetimeFigureOut">
               <a:rPr lang="en-US" smtClean="0"/>
-              <a:t>5/4/2026</a:t>
+              <a:t>5/6/2026</a:t>
             </a:fld>
             <a:endParaRPr lang="en-US"/>
           </a:p>
@@ -4373,7 +4374,7 @@
           <a:p>
             <a:fld id="{C969C9B9-ED5D-43CB-AC1B-AF4C7874EDD9}" type="datetimeFigureOut">
               <a:rPr lang="en-US" smtClean="0"/>
-              <a:t>5/4/2026</a:t>
+              <a:t>5/6/2026</a:t>
             </a:fld>
             <a:endParaRPr lang="en-US"/>
           </a:p>
@@ -4491,7 +4492,7 @@
           <a:p>
             <a:fld id="{C969C9B9-ED5D-43CB-AC1B-AF4C7874EDD9}" type="datetimeFigureOut">
               <a:rPr lang="en-US" smtClean="0"/>
-              <a:t>5/4/2026</a:t>
+              <a:t>5/6/2026</a:t>
             </a:fld>
             <a:endParaRPr lang="en-US"/>
           </a:p>
@@ -4586,7 +4587,7 @@
           <a:p>
             <a:fld id="{C969C9B9-ED5D-43CB-AC1B-AF4C7874EDD9}" type="datetimeFigureOut">
               <a:rPr lang="en-US" smtClean="0"/>
-              <a:t>5/4/2026</a:t>
+              <a:t>5/6/2026</a:t>
             </a:fld>
             <a:endParaRPr lang="en-US"/>
           </a:p>
@@ -4865,7 +4866,7 @@
           <a:p>
             <a:fld id="{C969C9B9-ED5D-43CB-AC1B-AF4C7874EDD9}" type="datetimeFigureOut">
               <a:rPr lang="en-US" smtClean="0"/>
-              <a:t>5/4/2026</a:t>
+              <a:t>5/6/2026</a:t>
             </a:fld>
             <a:endParaRPr lang="en-US"/>
           </a:p>
@@ -5140,7 +5141,7 @@
           <a:p>
             <a:fld id="{C969C9B9-ED5D-43CB-AC1B-AF4C7874EDD9}" type="datetimeFigureOut">
               <a:rPr lang="en-US" smtClean="0"/>
-              <a:t>5/4/2026</a:t>
+              <a:t>5/6/2026</a:t>
             </a:fld>
             <a:endParaRPr lang="en-US"/>
           </a:p>
@@ -5569,7 +5570,7 @@
           <a:p>
             <a:fld id="{C969C9B9-ED5D-43CB-AC1B-AF4C7874EDD9}" type="datetimeFigureOut">
               <a:rPr lang="en-US" smtClean="0"/>
-              <a:t>5/4/2026</a:t>
+              <a:t>5/6/2026</a:t>
             </a:fld>
             <a:endParaRPr lang="en-US"/>
           </a:p>
@@ -9630,7 +9631,13 @@
   <p:cSld>
     <p:spTree>
       <p:nvGrpSpPr>
-        <p:cNvPr id="1" name=""/>
+        <p:cNvPr id="1" name="">
+          <a:extLst>
+            <a:ext uri="{FF2B5EF4-FFF2-40B4-BE49-F238E27FC236}">
+              <a16:creationId xmlns:a16="http://schemas.microsoft.com/office/drawing/2014/main" id="{E263E80C-63EA-8EBD-AB9B-1E3D8E397041}"/>
+            </a:ext>
+          </a:extLst>
+        </p:cNvPr>
         <p:cNvGrpSpPr/>
         <p:nvPr/>
       </p:nvGrpSpPr>
@@ -9647,7 +9654,7 @@
           <p:cNvPr id="2" name="Заголовок 1">
             <a:extLst>
               <a:ext uri="{FF2B5EF4-FFF2-40B4-BE49-F238E27FC236}">
-                <a16:creationId xmlns:a16="http://schemas.microsoft.com/office/drawing/2014/main" id="{B5AEA9BD-75F9-CDAF-FFA4-07063467675C}"/>
+                <a16:creationId xmlns:a16="http://schemas.microsoft.com/office/drawing/2014/main" id="{68C6A67D-3552-7A8D-3AB3-C4E73347791A}"/>
               </a:ext>
             </a:extLst>
           </p:cNvPr>
@@ -9677,44 +9684,12 @@
           </a:p>
         </p:txBody>
       </p:sp>
-      <p:pic>
-        <p:nvPicPr>
-          <p:cNvPr id="5" name="Объект 4">
-            <a:extLst>
-              <a:ext uri="{FF2B5EF4-FFF2-40B4-BE49-F238E27FC236}">
-                <a16:creationId xmlns:a16="http://schemas.microsoft.com/office/drawing/2014/main" id="{D50FB749-A642-8F71-71C9-39F8C1FECE34}"/>
-              </a:ext>
-            </a:extLst>
-          </p:cNvPr>
-          <p:cNvPicPr>
-            <a:picLocks noGrp="1" noChangeAspect="1"/>
-          </p:cNvPicPr>
-          <p:nvPr>
-            <p:ph sz="half" idx="1"/>
-          </p:nvPr>
-        </p:nvPicPr>
-        <p:blipFill>
-          <a:blip r:embed="rId2"/>
-          <a:stretch>
-            <a:fillRect/>
-          </a:stretch>
-        </p:blipFill>
-        <p:spPr>
-          <a:xfrm>
-            <a:off x="1220176" y="2142769"/>
-            <a:ext cx="3324225" cy="3133725"/>
-          </a:xfrm>
-          <a:prstGeom prst="rect">
-            <a:avLst/>
-          </a:prstGeom>
-        </p:spPr>
-      </p:pic>
       <p:sp>
         <p:nvSpPr>
           <p:cNvPr id="8" name="Объект 7">
             <a:extLst>
               <a:ext uri="{FF2B5EF4-FFF2-40B4-BE49-F238E27FC236}">
-                <a16:creationId xmlns:a16="http://schemas.microsoft.com/office/drawing/2014/main" id="{087C2912-3C8C-AC82-7330-5CCC2327B9F6}"/>
+                <a16:creationId xmlns:a16="http://schemas.microsoft.com/office/drawing/2014/main" id="{4BEE11D2-56CD-5746-34A3-84F44B7FF8E9}"/>
               </a:ext>
             </a:extLst>
           </p:cNvPr>
@@ -9753,7 +9728,7 @@
           <p:cNvPr id="7" name="Рисунок 6">
             <a:extLst>
               <a:ext uri="{FF2B5EF4-FFF2-40B4-BE49-F238E27FC236}">
-                <a16:creationId xmlns:a16="http://schemas.microsoft.com/office/drawing/2014/main" id="{F68A1AA3-2AF9-6E32-9767-E5F04734E771}"/>
+                <a16:creationId xmlns:a16="http://schemas.microsoft.com/office/drawing/2014/main" id="{85FE4DD6-F714-F53E-C574-39C839BB5600}"/>
               </a:ext>
             </a:extLst>
           </p:cNvPr>
@@ -9763,7 +9738,7 @@
           <p:nvPr/>
         </p:nvPicPr>
         <p:blipFill>
-          <a:blip r:embed="rId3"/>
+          <a:blip r:embed="rId2"/>
           <a:stretch>
             <a:fillRect/>
           </a:stretch>
@@ -9783,7 +9758,7 @@
           <p:cNvPr id="12" name="TextBox 11">
             <a:extLst>
               <a:ext uri="{FF2B5EF4-FFF2-40B4-BE49-F238E27FC236}">
-                <a16:creationId xmlns:a16="http://schemas.microsoft.com/office/drawing/2014/main" id="{654C508C-F4AF-FC7A-C629-E582AFC3AE14}"/>
+                <a16:creationId xmlns:a16="http://schemas.microsoft.com/office/drawing/2014/main" id="{C7F50267-D6A4-489B-AC6A-45003CE624AC}"/>
               </a:ext>
             </a:extLst>
           </p:cNvPr>
@@ -9819,7 +9794,7 @@
           <p:cNvPr id="16" name="Стрелка: штриховая вправо 15">
             <a:extLst>
               <a:ext uri="{FF2B5EF4-FFF2-40B4-BE49-F238E27FC236}">
-                <a16:creationId xmlns:a16="http://schemas.microsoft.com/office/drawing/2014/main" id="{7461E8CE-B897-46DA-7DD9-71338DCF880F}"/>
+                <a16:creationId xmlns:a16="http://schemas.microsoft.com/office/drawing/2014/main" id="{4A9FEC4F-7CF9-F0CC-8C9D-AFB37CEE6C93}"/>
               </a:ext>
             </a:extLst>
           </p:cNvPr>
@@ -9865,7 +9840,7 @@
           <p:cNvPr id="18" name="TextBox 17">
             <a:extLst>
               <a:ext uri="{FF2B5EF4-FFF2-40B4-BE49-F238E27FC236}">
-                <a16:creationId xmlns:a16="http://schemas.microsoft.com/office/drawing/2014/main" id="{11D48A13-B701-DF0B-A91C-7926D4DE8D6A}"/>
+                <a16:creationId xmlns:a16="http://schemas.microsoft.com/office/drawing/2014/main" id="{C37B71A5-0ED8-0D21-98F3-1EBE6B57BDDA}"/>
               </a:ext>
             </a:extLst>
           </p:cNvPr>
@@ -9903,10 +9878,42 @@
           </a:p>
         </p:txBody>
       </p:sp>
+      <p:pic>
+        <p:nvPicPr>
+          <p:cNvPr id="9" name="Объект 8">
+            <a:extLst>
+              <a:ext uri="{FF2B5EF4-FFF2-40B4-BE49-F238E27FC236}">
+                <a16:creationId xmlns:a16="http://schemas.microsoft.com/office/drawing/2014/main" id="{F33CCF42-8B34-AEED-77AD-345D1570C5B1}"/>
+              </a:ext>
+            </a:extLst>
+          </p:cNvPr>
+          <p:cNvPicPr>
+            <a:picLocks noGrp="1" noChangeAspect="1"/>
+          </p:cNvPicPr>
+          <p:nvPr>
+            <p:ph sz="half" idx="1"/>
+          </p:nvPr>
+        </p:nvPicPr>
+        <p:blipFill>
+          <a:blip r:embed="rId3"/>
+          <a:stretch>
+            <a:fillRect/>
+          </a:stretch>
+        </p:blipFill>
+        <p:spPr>
+          <a:xfrm>
+            <a:off x="1222479" y="2068696"/>
+            <a:ext cx="3362325" cy="3343275"/>
+          </a:xfrm>
+          <a:prstGeom prst="rect">
+            <a:avLst/>
+          </a:prstGeom>
+        </p:spPr>
+      </p:pic>
     </p:spTree>
     <p:extLst>
       <p:ext uri="{BB962C8B-B14F-4D97-AF65-F5344CB8AC3E}">
-        <p14:creationId xmlns:p14="http://schemas.microsoft.com/office/powerpoint/2010/main" val="4230862229"/>
+        <p14:creationId xmlns:p14="http://schemas.microsoft.com/office/powerpoint/2010/main" val="1528382878"/>
       </p:ext>
     </p:extLst>
   </p:cSld>
@@ -10109,7 +10116,7 @@
                             </p:stCondLst>
                             <p:childTnLst>
                               <p:par>
-                                <p:cTn id="18" presetID="2" presetClass="entr" presetSubtype="4" fill="hold" nodeType="clickEffect">
+                                <p:cTn id="18" presetID="2" presetClass="entr" presetSubtype="4" fill="hold" grpId="0" nodeType="clickEffect">
                                   <p:stCondLst>
                                     <p:cond delay="0"/>
                                   </p:stCondLst>
@@ -10122,7 +10129,7 @@
                                           </p:stCondLst>
                                         </p:cTn>
                                         <p:tgtEl>
-                                          <p:spTgt spid="5"/>
+                                          <p:spTgt spid="16"/>
                                         </p:tgtEl>
                                         <p:attrNameLst>
                                           <p:attrName>style.visibility</p:attrName>
@@ -10136,7 +10143,7 @@
                                       <p:cBhvr additive="base">
                                         <p:cTn id="20" dur="500" fill="hold"/>
                                         <p:tgtEl>
-                                          <p:spTgt spid="5"/>
+                                          <p:spTgt spid="16"/>
                                         </p:tgtEl>
                                         <p:attrNameLst>
                                           <p:attrName>ppt_x</p:attrName>
@@ -10159,7 +10166,7 @@
                                       <p:cBhvr additive="base">
                                         <p:cTn id="21" dur="500" fill="hold"/>
                                         <p:tgtEl>
-                                          <p:spTgt spid="5"/>
+                                          <p:spTgt spid="16"/>
                                         </p:tgtEl>
                                         <p:attrNameLst>
                                           <p:attrName>ppt_y</p:attrName>
@@ -10200,7 +10207,7 @@
                             </p:stCondLst>
                             <p:childTnLst>
                               <p:par>
-                                <p:cTn id="24" presetID="2" presetClass="entr" presetSubtype="4" fill="hold" grpId="0" nodeType="clickEffect">
+                                <p:cTn id="24" presetID="14" presetClass="entr" presetSubtype="5" fill="hold" grpId="0" nodeType="clickEffect">
                                   <p:stCondLst>
                                     <p:cond delay="0"/>
                                   </p:stCondLst>
@@ -10213,7 +10220,68 @@
                                           </p:stCondLst>
                                         </p:cTn>
                                         <p:tgtEl>
-                                          <p:spTgt spid="16"/>
+                                          <p:spTgt spid="8">
+                                            <p:txEl>
+                                              <p:pRg st="0" end="0"/>
+                                            </p:txEl>
+                                          </p:spTgt>
+                                        </p:tgtEl>
+                                        <p:attrNameLst>
+                                          <p:attrName>style.visibility</p:attrName>
+                                        </p:attrNameLst>
+                                      </p:cBhvr>
+                                      <p:to>
+                                        <p:strVal val="visible"/>
+                                      </p:to>
+                                    </p:set>
+                                    <p:animEffect transition="in" filter="randombar(vertical)">
+                                      <p:cBhvr>
+                                        <p:cTn id="26" dur="500"/>
+                                        <p:tgtEl>
+                                          <p:spTgt spid="8">
+                                            <p:txEl>
+                                              <p:pRg st="0" end="0"/>
+                                            </p:txEl>
+                                          </p:spTgt>
+                                        </p:tgtEl>
+                                      </p:cBhvr>
+                                    </p:animEffect>
+                                  </p:childTnLst>
+                                </p:cTn>
+                              </p:par>
+                            </p:childTnLst>
+                          </p:cTn>
+                        </p:par>
+                      </p:childTnLst>
+                    </p:cTn>
+                  </p:par>
+                  <p:par>
+                    <p:cTn id="27" fill="hold">
+                      <p:stCondLst>
+                        <p:cond delay="indefinite"/>
+                      </p:stCondLst>
+                      <p:childTnLst>
+                        <p:par>
+                          <p:cTn id="28" fill="hold">
+                            <p:stCondLst>
+                              <p:cond delay="0"/>
+                            </p:stCondLst>
+                            <p:childTnLst>
+                              <p:par>
+                                <p:cTn id="29" presetID="2" presetClass="entr" presetSubtype="4" fill="hold" nodeType="clickEffect">
+                                  <p:stCondLst>
+                                    <p:cond delay="0"/>
+                                  </p:stCondLst>
+                                  <p:childTnLst>
+                                    <p:set>
+                                      <p:cBhvr>
+                                        <p:cTn id="30" dur="1" fill="hold">
+                                          <p:stCondLst>
+                                            <p:cond delay="0"/>
+                                          </p:stCondLst>
+                                        </p:cTn>
+                                        <p:tgtEl>
+                                          <p:spTgt spid="7"/>
                                         </p:tgtEl>
                                         <p:attrNameLst>
                                           <p:attrName>style.visibility</p:attrName>
@@ -10225,9 +10293,9 @@
                                     </p:set>
                                     <p:anim calcmode="lin" valueType="num">
                                       <p:cBhvr additive="base">
-                                        <p:cTn id="26" dur="500" fill="hold"/>
-                                        <p:tgtEl>
-                                          <p:spTgt spid="16"/>
+                                        <p:cTn id="31" dur="500" fill="hold"/>
+                                        <p:tgtEl>
+                                          <p:spTgt spid="7"/>
                                         </p:tgtEl>
                                         <p:attrNameLst>
                                           <p:attrName>ppt_x</p:attrName>
@@ -10248,159 +10316,7 @@
                                     </p:anim>
                                     <p:anim calcmode="lin" valueType="num">
                                       <p:cBhvr additive="base">
-                                        <p:cTn id="27" dur="500" fill="hold"/>
-                                        <p:tgtEl>
-                                          <p:spTgt spid="16"/>
-                                        </p:tgtEl>
-                                        <p:attrNameLst>
-                                          <p:attrName>ppt_y</p:attrName>
-                                        </p:attrNameLst>
-                                      </p:cBhvr>
-                                      <p:tavLst>
-                                        <p:tav tm="0">
-                                          <p:val>
-                                            <p:strVal val="1+#ppt_h/2"/>
-                                          </p:val>
-                                        </p:tav>
-                                        <p:tav tm="100000">
-                                          <p:val>
-                                            <p:strVal val="#ppt_y"/>
-                                          </p:val>
-                                        </p:tav>
-                                      </p:tavLst>
-                                    </p:anim>
-                                  </p:childTnLst>
-                                </p:cTn>
-                              </p:par>
-                            </p:childTnLst>
-                          </p:cTn>
-                        </p:par>
-                      </p:childTnLst>
-                    </p:cTn>
-                  </p:par>
-                  <p:par>
-                    <p:cTn id="28" fill="hold">
-                      <p:stCondLst>
-                        <p:cond delay="indefinite"/>
-                      </p:stCondLst>
-                      <p:childTnLst>
-                        <p:par>
-                          <p:cTn id="29" fill="hold">
-                            <p:stCondLst>
-                              <p:cond delay="0"/>
-                            </p:stCondLst>
-                            <p:childTnLst>
-                              <p:par>
-                                <p:cTn id="30" presetID="14" presetClass="entr" presetSubtype="5" fill="hold" grpId="0" nodeType="clickEffect">
-                                  <p:stCondLst>
-                                    <p:cond delay="0"/>
-                                  </p:stCondLst>
-                                  <p:childTnLst>
-                                    <p:set>
-                                      <p:cBhvr>
-                                        <p:cTn id="31" dur="1" fill="hold">
-                                          <p:stCondLst>
-                                            <p:cond delay="0"/>
-                                          </p:stCondLst>
-                                        </p:cTn>
-                                        <p:tgtEl>
-                                          <p:spTgt spid="8">
-                                            <p:txEl>
-                                              <p:pRg st="0" end="0"/>
-                                            </p:txEl>
-                                          </p:spTgt>
-                                        </p:tgtEl>
-                                        <p:attrNameLst>
-                                          <p:attrName>style.visibility</p:attrName>
-                                        </p:attrNameLst>
-                                      </p:cBhvr>
-                                      <p:to>
-                                        <p:strVal val="visible"/>
-                                      </p:to>
-                                    </p:set>
-                                    <p:animEffect transition="in" filter="randombar(vertical)">
-                                      <p:cBhvr>
-                                        <p:cTn id="32" dur="500"/>
-                                        <p:tgtEl>
-                                          <p:spTgt spid="8">
-                                            <p:txEl>
-                                              <p:pRg st="0" end="0"/>
-                                            </p:txEl>
-                                          </p:spTgt>
-                                        </p:tgtEl>
-                                      </p:cBhvr>
-                                    </p:animEffect>
-                                  </p:childTnLst>
-                                </p:cTn>
-                              </p:par>
-                            </p:childTnLst>
-                          </p:cTn>
-                        </p:par>
-                      </p:childTnLst>
-                    </p:cTn>
-                  </p:par>
-                  <p:par>
-                    <p:cTn id="33" fill="hold">
-                      <p:stCondLst>
-                        <p:cond delay="indefinite"/>
-                      </p:stCondLst>
-                      <p:childTnLst>
-                        <p:par>
-                          <p:cTn id="34" fill="hold">
-                            <p:stCondLst>
-                              <p:cond delay="0"/>
-                            </p:stCondLst>
-                            <p:childTnLst>
-                              <p:par>
-                                <p:cTn id="35" presetID="2" presetClass="entr" presetSubtype="4" fill="hold" nodeType="clickEffect">
-                                  <p:stCondLst>
-                                    <p:cond delay="0"/>
-                                  </p:stCondLst>
-                                  <p:childTnLst>
-                                    <p:set>
-                                      <p:cBhvr>
-                                        <p:cTn id="36" dur="1" fill="hold">
-                                          <p:stCondLst>
-                                            <p:cond delay="0"/>
-                                          </p:stCondLst>
-                                        </p:cTn>
-                                        <p:tgtEl>
-                                          <p:spTgt spid="7"/>
-                                        </p:tgtEl>
-                                        <p:attrNameLst>
-                                          <p:attrName>style.visibility</p:attrName>
-                                        </p:attrNameLst>
-                                      </p:cBhvr>
-                                      <p:to>
-                                        <p:strVal val="visible"/>
-                                      </p:to>
-                                    </p:set>
-                                    <p:anim calcmode="lin" valueType="num">
-                                      <p:cBhvr additive="base">
-                                        <p:cTn id="37" dur="500" fill="hold"/>
-                                        <p:tgtEl>
-                                          <p:spTgt spid="7"/>
-                                        </p:tgtEl>
-                                        <p:attrNameLst>
-                                          <p:attrName>ppt_x</p:attrName>
-                                        </p:attrNameLst>
-                                      </p:cBhvr>
-                                      <p:tavLst>
-                                        <p:tav tm="0">
-                                          <p:val>
-                                            <p:strVal val="#ppt_x"/>
-                                          </p:val>
-                                        </p:tav>
-                                        <p:tav tm="100000">
-                                          <p:val>
-                                            <p:strVal val="#ppt_x"/>
-                                          </p:val>
-                                        </p:tav>
-                                      </p:tavLst>
-                                    </p:anim>
-                                    <p:anim calcmode="lin" valueType="num">
-                                      <p:cBhvr additive="base">
-                                        <p:cTn id="38" dur="500" fill="hold"/>
+                                        <p:cTn id="32" dur="500" fill="hold"/>
                                         <p:tgtEl>
                                           <p:spTgt spid="7"/>
                                         </p:tgtEl>
@@ -10462,6 +10378,829 @@
 </file>
 
 <file path=ppt/slides/slide7.xml><?xml version="1.0" encoding="utf-8"?>
+<p:sld xmlns:a="http://schemas.openxmlformats.org/drawingml/2006/main" xmlns:r="http://schemas.openxmlformats.org/officeDocument/2006/relationships" xmlns:p="http://schemas.openxmlformats.org/presentationml/2006/main">
+  <p:cSld>
+    <p:spTree>
+      <p:nvGrpSpPr>
+        <p:cNvPr id="1" name="">
+          <a:extLst>
+            <a:ext uri="{FF2B5EF4-FFF2-40B4-BE49-F238E27FC236}">
+              <a16:creationId xmlns:a16="http://schemas.microsoft.com/office/drawing/2014/main" id="{F5B5C363-AD65-6A17-BBC1-942F69C83811}"/>
+            </a:ext>
+          </a:extLst>
+        </p:cNvPr>
+        <p:cNvGrpSpPr/>
+        <p:nvPr/>
+      </p:nvGrpSpPr>
+      <p:grpSpPr>
+        <a:xfrm>
+          <a:off x="0" y="0"/>
+          <a:ext cx="0" cy="0"/>
+          <a:chOff x="0" y="0"/>
+          <a:chExt cx="0" cy="0"/>
+        </a:xfrm>
+      </p:grpSpPr>
+      <p:sp>
+        <p:nvSpPr>
+          <p:cNvPr id="2" name="Заголовок 1">
+            <a:extLst>
+              <a:ext uri="{FF2B5EF4-FFF2-40B4-BE49-F238E27FC236}">
+                <a16:creationId xmlns:a16="http://schemas.microsoft.com/office/drawing/2014/main" id="{B50D2E06-FE84-FB5D-9DBE-E7E1FEE1E42B}"/>
+              </a:ext>
+            </a:extLst>
+          </p:cNvPr>
+          <p:cNvSpPr>
+            <a:spLocks noGrp="1"/>
+          </p:cNvSpPr>
+          <p:nvPr>
+            <p:ph type="title"/>
+          </p:nvPr>
+        </p:nvSpPr>
+        <p:spPr/>
+        <p:txBody>
+          <a:bodyPr/>
+          <a:lstStyle/>
+          <a:p>
+            <a:r>
+              <a:rPr lang="ru-RU" dirty="0"/>
+              <a:t>Что может делать программа</a:t>
+            </a:r>
+            <a:endParaRPr lang="en-US" dirty="0"/>
+          </a:p>
+        </p:txBody>
+      </p:sp>
+      <p:sp>
+        <p:nvSpPr>
+          <p:cNvPr id="3" name="Объект 2">
+            <a:extLst>
+              <a:ext uri="{FF2B5EF4-FFF2-40B4-BE49-F238E27FC236}">
+                <a16:creationId xmlns:a16="http://schemas.microsoft.com/office/drawing/2014/main" id="{9EC8FE29-E3F7-1F41-CED7-837276028724}"/>
+              </a:ext>
+            </a:extLst>
+          </p:cNvPr>
+          <p:cNvSpPr>
+            <a:spLocks noGrp="1"/>
+          </p:cNvSpPr>
+          <p:nvPr>
+            <p:ph idx="1"/>
+          </p:nvPr>
+        </p:nvSpPr>
+        <p:spPr/>
+        <p:txBody>
+          <a:bodyPr/>
+          <a:lstStyle/>
+          <a:p>
+            <a:r>
+              <a:rPr lang="ru-RU" dirty="0"/>
+              <a:t>Принимает</a:t>
+            </a:r>
+            <a:r>
+              <a:rPr lang="ru-RU" b="1" dirty="0"/>
+              <a:t> новых </a:t>
+            </a:r>
+            <a:r>
+              <a:rPr lang="ru-RU" dirty="0"/>
+              <a:t>клиентов в </a:t>
+            </a:r>
+            <a:r>
+              <a:rPr lang="ru-RU" b="1" dirty="0"/>
+              <a:t>базу данных</a:t>
+            </a:r>
+          </a:p>
+          <a:p>
+            <a:r>
+              <a:rPr lang="ru-RU" dirty="0"/>
+              <a:t>Проводит</a:t>
+            </a:r>
+            <a:r>
+              <a:rPr lang="ru-RU" b="1" dirty="0"/>
+              <a:t> валидацию</a:t>
+            </a:r>
+            <a:r>
+              <a:rPr lang="ru-RU" dirty="0"/>
+              <a:t> существующих </a:t>
+            </a:r>
+            <a:r>
+              <a:rPr lang="ru-RU" b="1" dirty="0"/>
+              <a:t>клиентов, </a:t>
+            </a:r>
+            <a:r>
+              <a:rPr lang="ru-RU" dirty="0"/>
+              <a:t>обеспечивать </a:t>
+            </a:r>
+            <a:r>
+              <a:rPr lang="ru-RU" b="1" dirty="0"/>
+              <a:t>логин в систему</a:t>
+            </a:r>
+          </a:p>
+          <a:p>
+            <a:r>
+              <a:rPr lang="ru-RU" dirty="0"/>
+              <a:t>Имеет</a:t>
+            </a:r>
+            <a:r>
+              <a:rPr lang="ru-RU" b="1" dirty="0"/>
+              <a:t> ограничение количества символов </a:t>
+            </a:r>
+            <a:r>
+              <a:rPr lang="ru-RU" dirty="0"/>
+              <a:t>в окнах логина и регистрации</a:t>
+            </a:r>
+          </a:p>
+          <a:p>
+            <a:r>
+              <a:rPr lang="ru-RU" dirty="0"/>
+              <a:t>Имеет </a:t>
+            </a:r>
+            <a:r>
+              <a:rPr lang="ru-RU" b="1" dirty="0"/>
+              <a:t>валидацию</a:t>
+            </a:r>
+            <a:r>
+              <a:rPr lang="ru-RU" dirty="0"/>
+              <a:t> полей </a:t>
+            </a:r>
+            <a:r>
+              <a:rPr lang="ru-RU" b="1" dirty="0"/>
+              <a:t>ввода</a:t>
+            </a:r>
+            <a:endParaRPr lang="en-US" dirty="0"/>
+          </a:p>
+        </p:txBody>
+      </p:sp>
+      <p:sp>
+        <p:nvSpPr>
+          <p:cNvPr id="5" name="TextBox 4">
+            <a:extLst>
+              <a:ext uri="{FF2B5EF4-FFF2-40B4-BE49-F238E27FC236}">
+                <a16:creationId xmlns:a16="http://schemas.microsoft.com/office/drawing/2014/main" id="{FBA45C25-96B1-5232-2487-2E666EA83BE4}"/>
+              </a:ext>
+            </a:extLst>
+          </p:cNvPr>
+          <p:cNvSpPr txBox="1"/>
+          <p:nvPr/>
+        </p:nvSpPr>
+        <p:spPr>
+          <a:xfrm>
+            <a:off x="3048000" y="6488668"/>
+            <a:ext cx="6096000" cy="369332"/>
+          </a:xfrm>
+          <a:prstGeom prst="rect">
+            <a:avLst/>
+          </a:prstGeom>
+          <a:noFill/>
+        </p:spPr>
+        <p:txBody>
+          <a:bodyPr wrap="square">
+            <a:spAutoFit/>
+          </a:bodyPr>
+          <a:lstStyle/>
+          <a:p>
+            <a:pPr marL="0" indent="0" algn="ctr">
+              <a:buNone/>
+            </a:pPr>
+            <a:r>
+              <a:rPr lang="ru-RU" sz="1800" dirty="0"/>
+              <a:t>Подготовлено Калиевой </a:t>
+            </a:r>
+            <a:r>
+              <a:rPr lang="ru-RU" sz="1800" dirty="0" err="1"/>
+              <a:t>Девией</a:t>
+            </a:r>
+            <a:endParaRPr lang="en-US" sz="1800" dirty="0"/>
+          </a:p>
+        </p:txBody>
+      </p:sp>
+    </p:spTree>
+    <p:extLst>
+      <p:ext uri="{BB962C8B-B14F-4D97-AF65-F5344CB8AC3E}">
+        <p14:creationId xmlns:p14="http://schemas.microsoft.com/office/powerpoint/2010/main" val="427870113"/>
+      </p:ext>
+    </p:extLst>
+  </p:cSld>
+  <p:clrMapOvr>
+    <a:masterClrMapping/>
+  </p:clrMapOvr>
+  <p:timing>
+    <p:tnLst>
+      <p:par>
+        <p:cTn id="1" dur="indefinite" restart="never" nodeType="tmRoot">
+          <p:childTnLst>
+            <p:seq concurrent="1" nextAc="seek">
+              <p:cTn id="2" dur="indefinite" nodeType="mainSeq">
+                <p:childTnLst>
+                  <p:par>
+                    <p:cTn id="3" fill="hold">
+                      <p:stCondLst>
+                        <p:cond delay="indefinite"/>
+                      </p:stCondLst>
+                      <p:childTnLst>
+                        <p:par>
+                          <p:cTn id="4" fill="hold">
+                            <p:stCondLst>
+                              <p:cond delay="0"/>
+                            </p:stCondLst>
+                            <p:childTnLst>
+                              <p:par>
+                                <p:cTn id="5" presetID="31" presetClass="entr" presetSubtype="0" fill="hold" grpId="0" nodeType="clickEffect">
+                                  <p:stCondLst>
+                                    <p:cond delay="0"/>
+                                  </p:stCondLst>
+                                  <p:childTnLst>
+                                    <p:set>
+                                      <p:cBhvr>
+                                        <p:cTn id="6" dur="1" fill="hold">
+                                          <p:stCondLst>
+                                            <p:cond delay="0"/>
+                                          </p:stCondLst>
+                                        </p:cTn>
+                                        <p:tgtEl>
+                                          <p:spTgt spid="2"/>
+                                        </p:tgtEl>
+                                        <p:attrNameLst>
+                                          <p:attrName>style.visibility</p:attrName>
+                                        </p:attrNameLst>
+                                      </p:cBhvr>
+                                      <p:to>
+                                        <p:strVal val="visible"/>
+                                      </p:to>
+                                    </p:set>
+                                    <p:anim calcmode="lin" valueType="num">
+                                      <p:cBhvr>
+                                        <p:cTn id="7" dur="1000" fill="hold"/>
+                                        <p:tgtEl>
+                                          <p:spTgt spid="2"/>
+                                        </p:tgtEl>
+                                        <p:attrNameLst>
+                                          <p:attrName>ppt_w</p:attrName>
+                                        </p:attrNameLst>
+                                      </p:cBhvr>
+                                      <p:tavLst>
+                                        <p:tav tm="0">
+                                          <p:val>
+                                            <p:fltVal val="0"/>
+                                          </p:val>
+                                        </p:tav>
+                                        <p:tav tm="100000">
+                                          <p:val>
+                                            <p:strVal val="#ppt_w"/>
+                                          </p:val>
+                                        </p:tav>
+                                      </p:tavLst>
+                                    </p:anim>
+                                    <p:anim calcmode="lin" valueType="num">
+                                      <p:cBhvr>
+                                        <p:cTn id="8" dur="1000" fill="hold"/>
+                                        <p:tgtEl>
+                                          <p:spTgt spid="2"/>
+                                        </p:tgtEl>
+                                        <p:attrNameLst>
+                                          <p:attrName>ppt_h</p:attrName>
+                                        </p:attrNameLst>
+                                      </p:cBhvr>
+                                      <p:tavLst>
+                                        <p:tav tm="0">
+                                          <p:val>
+                                            <p:fltVal val="0"/>
+                                          </p:val>
+                                        </p:tav>
+                                        <p:tav tm="100000">
+                                          <p:val>
+                                            <p:strVal val="#ppt_h"/>
+                                          </p:val>
+                                        </p:tav>
+                                      </p:tavLst>
+                                    </p:anim>
+                                    <p:anim calcmode="lin" valueType="num">
+                                      <p:cBhvr>
+                                        <p:cTn id="9" dur="1000" fill="hold"/>
+                                        <p:tgtEl>
+                                          <p:spTgt spid="2"/>
+                                        </p:tgtEl>
+                                        <p:attrNameLst>
+                                          <p:attrName>style.rotation</p:attrName>
+                                        </p:attrNameLst>
+                                      </p:cBhvr>
+                                      <p:tavLst>
+                                        <p:tav tm="0">
+                                          <p:val>
+                                            <p:fltVal val="90"/>
+                                          </p:val>
+                                        </p:tav>
+                                        <p:tav tm="100000">
+                                          <p:val>
+                                            <p:fltVal val="0"/>
+                                          </p:val>
+                                        </p:tav>
+                                      </p:tavLst>
+                                    </p:anim>
+                                    <p:animEffect transition="in" filter="fade">
+                                      <p:cBhvr>
+                                        <p:cTn id="10" dur="1000"/>
+                                        <p:tgtEl>
+                                          <p:spTgt spid="2"/>
+                                        </p:tgtEl>
+                                      </p:cBhvr>
+                                    </p:animEffect>
+                                  </p:childTnLst>
+                                </p:cTn>
+                              </p:par>
+                            </p:childTnLst>
+                          </p:cTn>
+                        </p:par>
+                      </p:childTnLst>
+                    </p:cTn>
+                  </p:par>
+                  <p:par>
+                    <p:cTn id="11" fill="hold">
+                      <p:stCondLst>
+                        <p:cond delay="indefinite"/>
+                      </p:stCondLst>
+                      <p:childTnLst>
+                        <p:par>
+                          <p:cTn id="12" fill="hold">
+                            <p:stCondLst>
+                              <p:cond delay="0"/>
+                            </p:stCondLst>
+                            <p:childTnLst>
+                              <p:par>
+                                <p:cTn id="13" presetID="42" presetClass="entr" presetSubtype="0" fill="hold" grpId="0" nodeType="clickEffect">
+                                  <p:stCondLst>
+                                    <p:cond delay="0"/>
+                                  </p:stCondLst>
+                                  <p:childTnLst>
+                                    <p:set>
+                                      <p:cBhvr>
+                                        <p:cTn id="14" dur="1" fill="hold">
+                                          <p:stCondLst>
+                                            <p:cond delay="0"/>
+                                          </p:stCondLst>
+                                        </p:cTn>
+                                        <p:tgtEl>
+                                          <p:spTgt spid="3">
+                                            <p:txEl>
+                                              <p:pRg st="0" end="0"/>
+                                            </p:txEl>
+                                          </p:spTgt>
+                                        </p:tgtEl>
+                                        <p:attrNameLst>
+                                          <p:attrName>style.visibility</p:attrName>
+                                        </p:attrNameLst>
+                                      </p:cBhvr>
+                                      <p:to>
+                                        <p:strVal val="visible"/>
+                                      </p:to>
+                                    </p:set>
+                                    <p:animEffect transition="in" filter="fade">
+                                      <p:cBhvr>
+                                        <p:cTn id="15" dur="1000"/>
+                                        <p:tgtEl>
+                                          <p:spTgt spid="3">
+                                            <p:txEl>
+                                              <p:pRg st="0" end="0"/>
+                                            </p:txEl>
+                                          </p:spTgt>
+                                        </p:tgtEl>
+                                      </p:cBhvr>
+                                    </p:animEffect>
+                                    <p:anim calcmode="lin" valueType="num">
+                                      <p:cBhvr>
+                                        <p:cTn id="16" dur="1000" fill="hold"/>
+                                        <p:tgtEl>
+                                          <p:spTgt spid="3">
+                                            <p:txEl>
+                                              <p:pRg st="0" end="0"/>
+                                            </p:txEl>
+                                          </p:spTgt>
+                                        </p:tgtEl>
+                                        <p:attrNameLst>
+                                          <p:attrName>ppt_x</p:attrName>
+                                        </p:attrNameLst>
+                                      </p:cBhvr>
+                                      <p:tavLst>
+                                        <p:tav tm="0">
+                                          <p:val>
+                                            <p:strVal val="#ppt_x"/>
+                                          </p:val>
+                                        </p:tav>
+                                        <p:tav tm="100000">
+                                          <p:val>
+                                            <p:strVal val="#ppt_x"/>
+                                          </p:val>
+                                        </p:tav>
+                                      </p:tavLst>
+                                    </p:anim>
+                                    <p:anim calcmode="lin" valueType="num">
+                                      <p:cBhvr>
+                                        <p:cTn id="17" dur="1000" fill="hold"/>
+                                        <p:tgtEl>
+                                          <p:spTgt spid="3">
+                                            <p:txEl>
+                                              <p:pRg st="0" end="0"/>
+                                            </p:txEl>
+                                          </p:spTgt>
+                                        </p:tgtEl>
+                                        <p:attrNameLst>
+                                          <p:attrName>ppt_y</p:attrName>
+                                        </p:attrNameLst>
+                                      </p:cBhvr>
+                                      <p:tavLst>
+                                        <p:tav tm="0">
+                                          <p:val>
+                                            <p:strVal val="#ppt_y+.1"/>
+                                          </p:val>
+                                        </p:tav>
+                                        <p:tav tm="100000">
+                                          <p:val>
+                                            <p:strVal val="#ppt_y"/>
+                                          </p:val>
+                                        </p:tav>
+                                      </p:tavLst>
+                                    </p:anim>
+                                  </p:childTnLst>
+                                </p:cTn>
+                              </p:par>
+                            </p:childTnLst>
+                          </p:cTn>
+                        </p:par>
+                      </p:childTnLst>
+                    </p:cTn>
+                  </p:par>
+                  <p:par>
+                    <p:cTn id="18" fill="hold">
+                      <p:stCondLst>
+                        <p:cond delay="indefinite"/>
+                      </p:stCondLst>
+                      <p:childTnLst>
+                        <p:par>
+                          <p:cTn id="19" fill="hold">
+                            <p:stCondLst>
+                              <p:cond delay="0"/>
+                            </p:stCondLst>
+                            <p:childTnLst>
+                              <p:par>
+                                <p:cTn id="20" presetID="42" presetClass="entr" presetSubtype="0" fill="hold" grpId="0" nodeType="clickEffect">
+                                  <p:stCondLst>
+                                    <p:cond delay="0"/>
+                                  </p:stCondLst>
+                                  <p:childTnLst>
+                                    <p:set>
+                                      <p:cBhvr>
+                                        <p:cTn id="21" dur="1" fill="hold">
+                                          <p:stCondLst>
+                                            <p:cond delay="0"/>
+                                          </p:stCondLst>
+                                        </p:cTn>
+                                        <p:tgtEl>
+                                          <p:spTgt spid="3">
+                                            <p:txEl>
+                                              <p:pRg st="1" end="1"/>
+                                            </p:txEl>
+                                          </p:spTgt>
+                                        </p:tgtEl>
+                                        <p:attrNameLst>
+                                          <p:attrName>style.visibility</p:attrName>
+                                        </p:attrNameLst>
+                                      </p:cBhvr>
+                                      <p:to>
+                                        <p:strVal val="visible"/>
+                                      </p:to>
+                                    </p:set>
+                                    <p:animEffect transition="in" filter="fade">
+                                      <p:cBhvr>
+                                        <p:cTn id="22" dur="1000"/>
+                                        <p:tgtEl>
+                                          <p:spTgt spid="3">
+                                            <p:txEl>
+                                              <p:pRg st="1" end="1"/>
+                                            </p:txEl>
+                                          </p:spTgt>
+                                        </p:tgtEl>
+                                      </p:cBhvr>
+                                    </p:animEffect>
+                                    <p:anim calcmode="lin" valueType="num">
+                                      <p:cBhvr>
+                                        <p:cTn id="23" dur="1000" fill="hold"/>
+                                        <p:tgtEl>
+                                          <p:spTgt spid="3">
+                                            <p:txEl>
+                                              <p:pRg st="1" end="1"/>
+                                            </p:txEl>
+                                          </p:spTgt>
+                                        </p:tgtEl>
+                                        <p:attrNameLst>
+                                          <p:attrName>ppt_x</p:attrName>
+                                        </p:attrNameLst>
+                                      </p:cBhvr>
+                                      <p:tavLst>
+                                        <p:tav tm="0">
+                                          <p:val>
+                                            <p:strVal val="#ppt_x"/>
+                                          </p:val>
+                                        </p:tav>
+                                        <p:tav tm="100000">
+                                          <p:val>
+                                            <p:strVal val="#ppt_x"/>
+                                          </p:val>
+                                        </p:tav>
+                                      </p:tavLst>
+                                    </p:anim>
+                                    <p:anim calcmode="lin" valueType="num">
+                                      <p:cBhvr>
+                                        <p:cTn id="24" dur="1000" fill="hold"/>
+                                        <p:tgtEl>
+                                          <p:spTgt spid="3">
+                                            <p:txEl>
+                                              <p:pRg st="1" end="1"/>
+                                            </p:txEl>
+                                          </p:spTgt>
+                                        </p:tgtEl>
+                                        <p:attrNameLst>
+                                          <p:attrName>ppt_y</p:attrName>
+                                        </p:attrNameLst>
+                                      </p:cBhvr>
+                                      <p:tavLst>
+                                        <p:tav tm="0">
+                                          <p:val>
+                                            <p:strVal val="#ppt_y+.1"/>
+                                          </p:val>
+                                        </p:tav>
+                                        <p:tav tm="100000">
+                                          <p:val>
+                                            <p:strVal val="#ppt_y"/>
+                                          </p:val>
+                                        </p:tav>
+                                      </p:tavLst>
+                                    </p:anim>
+                                  </p:childTnLst>
+                                </p:cTn>
+                              </p:par>
+                            </p:childTnLst>
+                          </p:cTn>
+                        </p:par>
+                      </p:childTnLst>
+                    </p:cTn>
+                  </p:par>
+                  <p:par>
+                    <p:cTn id="25" fill="hold">
+                      <p:stCondLst>
+                        <p:cond delay="indefinite"/>
+                      </p:stCondLst>
+                      <p:childTnLst>
+                        <p:par>
+                          <p:cTn id="26" fill="hold">
+                            <p:stCondLst>
+                              <p:cond delay="0"/>
+                            </p:stCondLst>
+                            <p:childTnLst>
+                              <p:par>
+                                <p:cTn id="27" presetID="42" presetClass="entr" presetSubtype="0" fill="hold" grpId="0" nodeType="clickEffect">
+                                  <p:stCondLst>
+                                    <p:cond delay="0"/>
+                                  </p:stCondLst>
+                                  <p:childTnLst>
+                                    <p:set>
+                                      <p:cBhvr>
+                                        <p:cTn id="28" dur="1" fill="hold">
+                                          <p:stCondLst>
+                                            <p:cond delay="0"/>
+                                          </p:stCondLst>
+                                        </p:cTn>
+                                        <p:tgtEl>
+                                          <p:spTgt spid="3">
+                                            <p:txEl>
+                                              <p:pRg st="2" end="2"/>
+                                            </p:txEl>
+                                          </p:spTgt>
+                                        </p:tgtEl>
+                                        <p:attrNameLst>
+                                          <p:attrName>style.visibility</p:attrName>
+                                        </p:attrNameLst>
+                                      </p:cBhvr>
+                                      <p:to>
+                                        <p:strVal val="visible"/>
+                                      </p:to>
+                                    </p:set>
+                                    <p:animEffect transition="in" filter="fade">
+                                      <p:cBhvr>
+                                        <p:cTn id="29" dur="1000"/>
+                                        <p:tgtEl>
+                                          <p:spTgt spid="3">
+                                            <p:txEl>
+                                              <p:pRg st="2" end="2"/>
+                                            </p:txEl>
+                                          </p:spTgt>
+                                        </p:tgtEl>
+                                      </p:cBhvr>
+                                    </p:animEffect>
+                                    <p:anim calcmode="lin" valueType="num">
+                                      <p:cBhvr>
+                                        <p:cTn id="30" dur="1000" fill="hold"/>
+                                        <p:tgtEl>
+                                          <p:spTgt spid="3">
+                                            <p:txEl>
+                                              <p:pRg st="2" end="2"/>
+                                            </p:txEl>
+                                          </p:spTgt>
+                                        </p:tgtEl>
+                                        <p:attrNameLst>
+                                          <p:attrName>ppt_x</p:attrName>
+                                        </p:attrNameLst>
+                                      </p:cBhvr>
+                                      <p:tavLst>
+                                        <p:tav tm="0">
+                                          <p:val>
+                                            <p:strVal val="#ppt_x"/>
+                                          </p:val>
+                                        </p:tav>
+                                        <p:tav tm="100000">
+                                          <p:val>
+                                            <p:strVal val="#ppt_x"/>
+                                          </p:val>
+                                        </p:tav>
+                                      </p:tavLst>
+                                    </p:anim>
+                                    <p:anim calcmode="lin" valueType="num">
+                                      <p:cBhvr>
+                                        <p:cTn id="31" dur="1000" fill="hold"/>
+                                        <p:tgtEl>
+                                          <p:spTgt spid="3">
+                                            <p:txEl>
+                                              <p:pRg st="2" end="2"/>
+                                            </p:txEl>
+                                          </p:spTgt>
+                                        </p:tgtEl>
+                                        <p:attrNameLst>
+                                          <p:attrName>ppt_y</p:attrName>
+                                        </p:attrNameLst>
+                                      </p:cBhvr>
+                                      <p:tavLst>
+                                        <p:tav tm="0">
+                                          <p:val>
+                                            <p:strVal val="#ppt_y+.1"/>
+                                          </p:val>
+                                        </p:tav>
+                                        <p:tav tm="100000">
+                                          <p:val>
+                                            <p:strVal val="#ppt_y"/>
+                                          </p:val>
+                                        </p:tav>
+                                      </p:tavLst>
+                                    </p:anim>
+                                  </p:childTnLst>
+                                </p:cTn>
+                              </p:par>
+                            </p:childTnLst>
+                          </p:cTn>
+                        </p:par>
+                      </p:childTnLst>
+                    </p:cTn>
+                  </p:par>
+                  <p:par>
+                    <p:cTn id="32" fill="hold">
+                      <p:stCondLst>
+                        <p:cond delay="indefinite"/>
+                      </p:stCondLst>
+                      <p:childTnLst>
+                        <p:par>
+                          <p:cTn id="33" fill="hold">
+                            <p:stCondLst>
+                              <p:cond delay="0"/>
+                            </p:stCondLst>
+                            <p:childTnLst>
+                              <p:par>
+                                <p:cTn id="34" presetID="42" presetClass="entr" presetSubtype="0" fill="hold" grpId="0" nodeType="clickEffect">
+                                  <p:stCondLst>
+                                    <p:cond delay="0"/>
+                                  </p:stCondLst>
+                                  <p:childTnLst>
+                                    <p:set>
+                                      <p:cBhvr>
+                                        <p:cTn id="35" dur="1" fill="hold">
+                                          <p:stCondLst>
+                                            <p:cond delay="0"/>
+                                          </p:stCondLst>
+                                        </p:cTn>
+                                        <p:tgtEl>
+                                          <p:spTgt spid="3">
+                                            <p:txEl>
+                                              <p:pRg st="3" end="3"/>
+                                            </p:txEl>
+                                          </p:spTgt>
+                                        </p:tgtEl>
+                                        <p:attrNameLst>
+                                          <p:attrName>style.visibility</p:attrName>
+                                        </p:attrNameLst>
+                                      </p:cBhvr>
+                                      <p:to>
+                                        <p:strVal val="visible"/>
+                                      </p:to>
+                                    </p:set>
+                                    <p:animEffect transition="in" filter="fade">
+                                      <p:cBhvr>
+                                        <p:cTn id="36" dur="1000"/>
+                                        <p:tgtEl>
+                                          <p:spTgt spid="3">
+                                            <p:txEl>
+                                              <p:pRg st="3" end="3"/>
+                                            </p:txEl>
+                                          </p:spTgt>
+                                        </p:tgtEl>
+                                      </p:cBhvr>
+                                    </p:animEffect>
+                                    <p:anim calcmode="lin" valueType="num">
+                                      <p:cBhvr>
+                                        <p:cTn id="37" dur="1000" fill="hold"/>
+                                        <p:tgtEl>
+                                          <p:spTgt spid="3">
+                                            <p:txEl>
+                                              <p:pRg st="3" end="3"/>
+                                            </p:txEl>
+                                          </p:spTgt>
+                                        </p:tgtEl>
+                                        <p:attrNameLst>
+                                          <p:attrName>ppt_x</p:attrName>
+                                        </p:attrNameLst>
+                                      </p:cBhvr>
+                                      <p:tavLst>
+                                        <p:tav tm="0">
+                                          <p:val>
+                                            <p:strVal val="#ppt_x"/>
+                                          </p:val>
+                                        </p:tav>
+                                        <p:tav tm="100000">
+                                          <p:val>
+                                            <p:strVal val="#ppt_x"/>
+                                          </p:val>
+                                        </p:tav>
+                                      </p:tavLst>
+                                    </p:anim>
+                                    <p:anim calcmode="lin" valueType="num">
+                                      <p:cBhvr>
+                                        <p:cTn id="38" dur="1000" fill="hold"/>
+                                        <p:tgtEl>
+                                          <p:spTgt spid="3">
+                                            <p:txEl>
+                                              <p:pRg st="3" end="3"/>
+                                            </p:txEl>
+                                          </p:spTgt>
+                                        </p:tgtEl>
+                                        <p:attrNameLst>
+                                          <p:attrName>ppt_y</p:attrName>
+                                        </p:attrNameLst>
+                                      </p:cBhvr>
+                                      <p:tavLst>
+                                        <p:tav tm="0">
+                                          <p:val>
+                                            <p:strVal val="#ppt_y+.1"/>
+                                          </p:val>
+                                        </p:tav>
+                                        <p:tav tm="100000">
+                                          <p:val>
+                                            <p:strVal val="#ppt_y"/>
+                                          </p:val>
+                                        </p:tav>
+                                      </p:tavLst>
+                                    </p:anim>
+                                  </p:childTnLst>
+                                </p:cTn>
+                              </p:par>
+                            </p:childTnLst>
+                          </p:cTn>
+                        </p:par>
+                      </p:childTnLst>
+                    </p:cTn>
+                  </p:par>
+                </p:childTnLst>
+              </p:cTn>
+              <p:prevCondLst>
+                <p:cond evt="onPrev" delay="0">
+                  <p:tgtEl>
+                    <p:sldTgt/>
+                  </p:tgtEl>
+                </p:cond>
+              </p:prevCondLst>
+              <p:nextCondLst>
+                <p:cond evt="onNext" delay="0">
+                  <p:tgtEl>
+                    <p:sldTgt/>
+                  </p:tgtEl>
+                </p:cond>
+              </p:nextCondLst>
+            </p:seq>
+          </p:childTnLst>
+        </p:cTn>
+      </p:par>
+    </p:tnLst>
+    <p:bldLst>
+      <p:bldP spid="2" grpId="0"/>
+      <p:bldP spid="3" grpId="0" build="p"/>
+    </p:bldLst>
+  </p:timing>
+</p:sld>
+</file>
+
+<file path=ppt/slides/slide8.xml><?xml version="1.0" encoding="utf-8"?>
 <p:sld xmlns:a="http://schemas.openxmlformats.org/drawingml/2006/main" xmlns:r="http://schemas.openxmlformats.org/officeDocument/2006/relationships" xmlns:p="http://schemas.openxmlformats.org/presentationml/2006/main">
   <p:cSld>
     <p:spTree>

--- a/presentation.pptx
+++ b/presentation.pptx
@@ -9053,19 +9053,8 @@
             </a:r>
             <a:r>
               <a:rPr lang="ru-RU" dirty="0"/>
-              <a:t>для дизайна</a:t>
-            </a:r>
-          </a:p>
-          <a:p>
-            <a:r>
-              <a:rPr lang="en-US" b="1" dirty="0"/>
-              <a:t>Python </a:t>
-            </a:r>
-            <a:r>
-              <a:rPr lang="ru-RU" dirty="0"/>
-              <a:t>для основной части программирования</a:t>
-            </a:r>
-            <a:endParaRPr lang="en-US" dirty="0"/>
+              <a:t>для дизайна и валидации</a:t>
+            </a:r>
           </a:p>
         </p:txBody>
       </p:sp>
@@ -9453,121 +9442,6 @@
                                           <p:spTgt spid="3">
                                             <p:txEl>
                                               <p:pRg st="1" end="1"/>
-                                            </p:txEl>
-                                          </p:spTgt>
-                                        </p:tgtEl>
-                                        <p:attrNameLst>
-                                          <p:attrName>ppt_y</p:attrName>
-                                        </p:attrNameLst>
-                                      </p:cBhvr>
-                                      <p:tavLst>
-                                        <p:tav tm="0">
-                                          <p:val>
-                                            <p:strVal val="#ppt_y+.1"/>
-                                          </p:val>
-                                        </p:tav>
-                                        <p:tav tm="100000">
-                                          <p:val>
-                                            <p:strVal val="#ppt_y"/>
-                                          </p:val>
-                                        </p:tav>
-                                      </p:tavLst>
-                                    </p:anim>
-                                  </p:childTnLst>
-                                </p:cTn>
-                              </p:par>
-                            </p:childTnLst>
-                          </p:cTn>
-                        </p:par>
-                      </p:childTnLst>
-                    </p:cTn>
-                  </p:par>
-                  <p:par>
-                    <p:cTn id="25" fill="hold">
-                      <p:stCondLst>
-                        <p:cond delay="indefinite"/>
-                      </p:stCondLst>
-                      <p:childTnLst>
-                        <p:par>
-                          <p:cTn id="26" fill="hold">
-                            <p:stCondLst>
-                              <p:cond delay="0"/>
-                            </p:stCondLst>
-                            <p:childTnLst>
-                              <p:par>
-                                <p:cTn id="27" presetID="42" presetClass="entr" presetSubtype="0" fill="hold" grpId="0" nodeType="clickEffect">
-                                  <p:stCondLst>
-                                    <p:cond delay="0"/>
-                                  </p:stCondLst>
-                                  <p:childTnLst>
-                                    <p:set>
-                                      <p:cBhvr>
-                                        <p:cTn id="28" dur="1" fill="hold">
-                                          <p:stCondLst>
-                                            <p:cond delay="0"/>
-                                          </p:stCondLst>
-                                        </p:cTn>
-                                        <p:tgtEl>
-                                          <p:spTgt spid="3">
-                                            <p:txEl>
-                                              <p:pRg st="2" end="2"/>
-                                            </p:txEl>
-                                          </p:spTgt>
-                                        </p:tgtEl>
-                                        <p:attrNameLst>
-                                          <p:attrName>style.visibility</p:attrName>
-                                        </p:attrNameLst>
-                                      </p:cBhvr>
-                                      <p:to>
-                                        <p:strVal val="visible"/>
-                                      </p:to>
-                                    </p:set>
-                                    <p:animEffect transition="in" filter="fade">
-                                      <p:cBhvr>
-                                        <p:cTn id="29" dur="1000"/>
-                                        <p:tgtEl>
-                                          <p:spTgt spid="3">
-                                            <p:txEl>
-                                              <p:pRg st="2" end="2"/>
-                                            </p:txEl>
-                                          </p:spTgt>
-                                        </p:tgtEl>
-                                      </p:cBhvr>
-                                    </p:animEffect>
-                                    <p:anim calcmode="lin" valueType="num">
-                                      <p:cBhvr>
-                                        <p:cTn id="30" dur="1000" fill="hold"/>
-                                        <p:tgtEl>
-                                          <p:spTgt spid="3">
-                                            <p:txEl>
-                                              <p:pRg st="2" end="2"/>
-                                            </p:txEl>
-                                          </p:spTgt>
-                                        </p:tgtEl>
-                                        <p:attrNameLst>
-                                          <p:attrName>ppt_x</p:attrName>
-                                        </p:attrNameLst>
-                                      </p:cBhvr>
-                                      <p:tavLst>
-                                        <p:tav tm="0">
-                                          <p:val>
-                                            <p:strVal val="#ppt_x"/>
-                                          </p:val>
-                                        </p:tav>
-                                        <p:tav tm="100000">
-                                          <p:val>
-                                            <p:strVal val="#ppt_x"/>
-                                          </p:val>
-                                        </p:tav>
-                                      </p:tavLst>
-                                    </p:anim>
-                                    <p:anim calcmode="lin" valueType="num">
-                                      <p:cBhvr>
-                                        <p:cTn id="31" dur="1000" fill="hold"/>
-                                        <p:tgtEl>
-                                          <p:spTgt spid="3">
-                                            <p:txEl>
-                                              <p:pRg st="2" end="2"/>
                                             </p:txEl>
                                           </p:spTgt>
                                         </p:tgtEl>
